--- a/docs/PITCH.pptx
+++ b/docs/PITCH.pptx
@@ -1,33 +1,33 @@
 
 <file path=ppt/presentation.xml><?xml version="1.0" encoding="utf-8"?>
-<p:presentation xmlns:a="http://schemas.openxmlformats.org/drawingml/2006/main" xmlns:p="http://schemas.openxmlformats.org/presentationml/2006/main" xmlns:r="http://schemas.openxmlformats.org/officeDocument/2006/relationships" autoCompressPictures="0" saveSubsetFonts="1">
+<p:presentation xmlns:a="http://schemas.openxmlformats.org/drawingml/2006/main" xmlns:r="http://schemas.openxmlformats.org/officeDocument/2006/relationships" xmlns:p="http://schemas.openxmlformats.org/presentationml/2006/main" saveSubsetFonts="1" autoCompressPictures="0">
   <p:sldMasterIdLst>
     <p:sldMasterId id="2147483648" r:id="rId1"/>
   </p:sldMasterIdLst>
   <p:sldIdLst>
-    <p:sldId id="256" r:id="rId2"/>
-    <p:sldId id="257" r:id="rId3"/>
-    <p:sldId id="258" r:id="rId4"/>
-    <p:sldId id="259" r:id="rId5"/>
-    <p:sldId id="260" r:id="rId6"/>
-    <p:sldId id="261" r:id="rId7"/>
-    <p:sldId id="262" r:id="rId8"/>
-    <p:sldId id="263" r:id="rId9"/>
-    <p:sldId id="264" r:id="rId10"/>
-    <p:sldId id="265" r:id="rId11"/>
-    <p:sldId id="266" r:id="rId12"/>
-    <p:sldId id="267" r:id="rId13"/>
-    <p:sldId id="268" r:id="rId14"/>
-    <p:sldId id="269" r:id="rId15"/>
+    <p:sldId id="256" r:id="rId7"/>
+    <p:sldId id="257" r:id="rId8"/>
+    <p:sldId id="258" r:id="rId9"/>
+    <p:sldId id="259" r:id="rId10"/>
+    <p:sldId id="260" r:id="rId11"/>
+    <p:sldId id="261" r:id="rId12"/>
+    <p:sldId id="262" r:id="rId13"/>
+    <p:sldId id="263" r:id="rId14"/>
+    <p:sldId id="264" r:id="rId15"/>
+    <p:sldId id="265" r:id="rId16"/>
+    <p:sldId id="266" r:id="rId17"/>
+    <p:sldId id="267" r:id="rId18"/>
+    <p:sldId id="268" r:id="rId19"/>
+    <p:sldId id="269" r:id="rId20"/>
   </p:sldIdLst>
-  <p:sldSz cx="9144000" cy="5143500" type="screen16x9"/>
+  <p:sldSz cx="12191695" cy="6858000" type="screen4x3"/>
   <p:notesSz cx="6858000" cy="9144000"/>
   <p:defaultTextStyle>
     <a:defPPr>
       <a:defRPr lang="en-US"/>
     </a:defPPr>
-    <a:lvl1pPr algn="l" defTabSz="457200" eaLnBrk="1" hangingPunct="1" latinLnBrk="0" marL="0" rtl="0">
-      <a:defRPr kern="1200" sz="1800">
+    <a:lvl1pPr marL="0" algn="l" defTabSz="457200" rtl="0" eaLnBrk="1" latinLnBrk="0" hangingPunct="1">
+      <a:defRPr sz="1800" kern="1200">
         <a:solidFill>
           <a:schemeClr val="tx1"/>
         </a:solidFill>
@@ -36,8 +36,8 @@
         <a:cs typeface="+mn-cs"/>
       </a:defRPr>
     </a:lvl1pPr>
-    <a:lvl2pPr algn="l" defTabSz="457200" eaLnBrk="1" hangingPunct="1" latinLnBrk="0" marL="457200" rtl="0">
-      <a:defRPr kern="1200" sz="1800">
+    <a:lvl2pPr marL="457200" algn="l" defTabSz="457200" rtl="0" eaLnBrk="1" latinLnBrk="0" hangingPunct="1">
+      <a:defRPr sz="1800" kern="1200">
         <a:solidFill>
           <a:schemeClr val="tx1"/>
         </a:solidFill>
@@ -46,8 +46,8 @@
         <a:cs typeface="+mn-cs"/>
       </a:defRPr>
     </a:lvl2pPr>
-    <a:lvl3pPr algn="l" defTabSz="457200" eaLnBrk="1" hangingPunct="1" latinLnBrk="0" marL="914400" rtl="0">
-      <a:defRPr kern="1200" sz="1800">
+    <a:lvl3pPr marL="914400" algn="l" defTabSz="457200" rtl="0" eaLnBrk="1" latinLnBrk="0" hangingPunct="1">
+      <a:defRPr sz="1800" kern="1200">
         <a:solidFill>
           <a:schemeClr val="tx1"/>
         </a:solidFill>
@@ -56,8 +56,8 @@
         <a:cs typeface="+mn-cs"/>
       </a:defRPr>
     </a:lvl3pPr>
-    <a:lvl4pPr algn="l" defTabSz="457200" eaLnBrk="1" hangingPunct="1" latinLnBrk="0" marL="1371600" rtl="0">
-      <a:defRPr kern="1200" sz="1800">
+    <a:lvl4pPr marL="1371600" algn="l" defTabSz="457200" rtl="0" eaLnBrk="1" latinLnBrk="0" hangingPunct="1">
+      <a:defRPr sz="1800" kern="1200">
         <a:solidFill>
           <a:schemeClr val="tx1"/>
         </a:solidFill>
@@ -66,8 +66,8 @@
         <a:cs typeface="+mn-cs"/>
       </a:defRPr>
     </a:lvl4pPr>
-    <a:lvl5pPr algn="l" defTabSz="457200" eaLnBrk="1" hangingPunct="1" latinLnBrk="0" marL="1828800" rtl="0">
-      <a:defRPr kern="1200" sz="1800">
+    <a:lvl5pPr marL="1828800" algn="l" defTabSz="457200" rtl="0" eaLnBrk="1" latinLnBrk="0" hangingPunct="1">
+      <a:defRPr sz="1800" kern="1200">
         <a:solidFill>
           <a:schemeClr val="tx1"/>
         </a:solidFill>
@@ -76,8 +76,8 @@
         <a:cs typeface="+mn-cs"/>
       </a:defRPr>
     </a:lvl5pPr>
-    <a:lvl6pPr algn="l" defTabSz="457200" eaLnBrk="1" hangingPunct="1" latinLnBrk="0" marL="2286000" rtl="0">
-      <a:defRPr kern="1200" sz="1800">
+    <a:lvl6pPr marL="2286000" algn="l" defTabSz="457200" rtl="0" eaLnBrk="1" latinLnBrk="0" hangingPunct="1">
+      <a:defRPr sz="1800" kern="1200">
         <a:solidFill>
           <a:schemeClr val="tx1"/>
         </a:solidFill>
@@ -86,8 +86,8 @@
         <a:cs typeface="+mn-cs"/>
       </a:defRPr>
     </a:lvl6pPr>
-    <a:lvl7pPr algn="l" defTabSz="457200" eaLnBrk="1" hangingPunct="1" latinLnBrk="0" marL="2743200" rtl="0">
-      <a:defRPr kern="1200" sz="1800">
+    <a:lvl7pPr marL="2743200" algn="l" defTabSz="457200" rtl="0" eaLnBrk="1" latinLnBrk="0" hangingPunct="1">
+      <a:defRPr sz="1800" kern="1200">
         <a:solidFill>
           <a:schemeClr val="tx1"/>
         </a:solidFill>
@@ -96,8 +96,8 @@
         <a:cs typeface="+mn-cs"/>
       </a:defRPr>
     </a:lvl7pPr>
-    <a:lvl8pPr algn="l" defTabSz="457200" eaLnBrk="1" hangingPunct="1" latinLnBrk="0" marL="3200400" rtl="0">
-      <a:defRPr kern="1200" sz="1800">
+    <a:lvl8pPr marL="3200400" algn="l" defTabSz="457200" rtl="0" eaLnBrk="1" latinLnBrk="0" hangingPunct="1">
+      <a:defRPr sz="1800" kern="1200">
         <a:solidFill>
           <a:schemeClr val="tx1"/>
         </a:solidFill>
@@ -106,8 +106,8 @@
         <a:cs typeface="+mn-cs"/>
       </a:defRPr>
     </a:lvl8pPr>
-    <a:lvl9pPr algn="l" defTabSz="457200" eaLnBrk="1" hangingPunct="1" latinLnBrk="0" marL="3657600" rtl="0">
-      <a:defRPr kern="1200" sz="1800">
+    <a:lvl9pPr marL="3657600" algn="l" defTabSz="457200" rtl="0" eaLnBrk="1" latinLnBrk="0" hangingPunct="1">
+      <a:defRPr sz="1800" kern="1200">
         <a:solidFill>
           <a:schemeClr val="tx1"/>
         </a:solidFill>
@@ -117,22 +117,6 @@
       </a:defRPr>
     </a:lvl9pPr>
   </p:defaultTextStyle>
-  <p:extLst>
-    <p:ext uri="{EFAFB233-063F-42B5-8137-9DF3F51BA10A}">
-      <p15:sldGuideLst xmlns:p15="http://schemas.microsoft.com/office/powerpoint/2012/main">
-        <p15:guide id="1" orient="horz" pos="1620" userDrawn="1">
-          <p15:clr>
-            <a:srgbClr val="A4A3A4"/>
-          </p15:clr>
-        </p15:guide>
-        <p15:guide id="2" pos="2880" userDrawn="1">
-          <p15:clr>
-            <a:srgbClr val="A4A3A4"/>
-          </p15:clr>
-        </p15:guide>
-      </p15:sldGuideLst>
-    </p:ext>
-  </p:extLst>
 </p:presentation>
 </file>
 
@@ -165,8 +149,8 @@
         </p:nvSpPr>
         <p:spPr>
           <a:xfrm>
-            <a:off x="685800" y="1597819"/>
-            <a:ext cx="7772400" cy="1102519"/>
+            <a:off x="685800" y="2130425"/>
+            <a:ext cx="7772400" cy="1470025"/>
           </a:xfrm>
         </p:spPr>
         <p:txBody>
@@ -174,9 +158,10 @@
           <a:lstStyle/>
           <a:p>
             <a:r>
-              <a:rPr lang="en-US"/>
+              <a:rPr lang="en-US" smtClean="0"/>
               <a:t>Click to edit Master title style</a:t>
             </a:r>
+            <a:endParaRPr lang="en-US"/>
           </a:p>
         </p:txBody>
       </p:sp>
@@ -192,8 +177,8 @@
         </p:nvSpPr>
         <p:spPr>
           <a:xfrm>
-            <a:off x="1371600" y="2914650"/>
-            <a:ext cx="6400800" cy="1314450"/>
+            <a:off x="1371600" y="3886200"/>
+            <a:ext cx="6400800" cy="1752600"/>
           </a:xfrm>
         </p:spPr>
         <p:txBody>
@@ -209,7 +194,7 @@
                 </a:solidFill>
               </a:defRPr>
             </a:lvl1pPr>
-            <a:lvl2pPr marL="342900" indent="0" algn="ctr">
+            <a:lvl2pPr marL="457200" indent="0" algn="ctr">
               <a:buNone/>
               <a:defRPr>
                 <a:solidFill>
@@ -219,7 +204,7 @@
                 </a:solidFill>
               </a:defRPr>
             </a:lvl2pPr>
-            <a:lvl3pPr marL="685800" indent="0" algn="ctr">
+            <a:lvl3pPr marL="914400" indent="0" algn="ctr">
               <a:buNone/>
               <a:defRPr>
                 <a:solidFill>
@@ -229,7 +214,7 @@
                 </a:solidFill>
               </a:defRPr>
             </a:lvl3pPr>
-            <a:lvl4pPr marL="1028700" indent="0" algn="ctr">
+            <a:lvl4pPr marL="1371600" indent="0" algn="ctr">
               <a:buNone/>
               <a:defRPr>
                 <a:solidFill>
@@ -239,7 +224,7 @@
                 </a:solidFill>
               </a:defRPr>
             </a:lvl4pPr>
-            <a:lvl5pPr marL="1371600" indent="0" algn="ctr">
+            <a:lvl5pPr marL="1828800" indent="0" algn="ctr">
               <a:buNone/>
               <a:defRPr>
                 <a:solidFill>
@@ -249,7 +234,7 @@
                 </a:solidFill>
               </a:defRPr>
             </a:lvl5pPr>
-            <a:lvl6pPr marL="1714500" indent="0" algn="ctr">
+            <a:lvl6pPr marL="2286000" indent="0" algn="ctr">
               <a:buNone/>
               <a:defRPr>
                 <a:solidFill>
@@ -259,7 +244,7 @@
                 </a:solidFill>
               </a:defRPr>
             </a:lvl6pPr>
-            <a:lvl7pPr marL="2057400" indent="0" algn="ctr">
+            <a:lvl7pPr marL="2743200" indent="0" algn="ctr">
               <a:buNone/>
               <a:defRPr>
                 <a:solidFill>
@@ -269,7 +254,7 @@
                 </a:solidFill>
               </a:defRPr>
             </a:lvl7pPr>
-            <a:lvl8pPr marL="2400300" indent="0" algn="ctr">
+            <a:lvl8pPr marL="3200400" indent="0" algn="ctr">
               <a:buNone/>
               <a:defRPr>
                 <a:solidFill>
@@ -279,7 +264,7 @@
                 </a:solidFill>
               </a:defRPr>
             </a:lvl8pPr>
-            <a:lvl9pPr marL="2743200" indent="0" algn="ctr">
+            <a:lvl9pPr marL="3657600" indent="0" algn="ctr">
               <a:buNone/>
               <a:defRPr>
                 <a:solidFill>
@@ -292,9 +277,10 @@
           </a:lstStyle>
           <a:p>
             <a:r>
-              <a:rPr lang="en-US"/>
+              <a:rPr lang="en-US" smtClean="0"/>
               <a:t>Click to edit Master subtitle style</a:t>
             </a:r>
+            <a:endParaRPr lang="en-US"/>
           </a:p>
         </p:txBody>
       </p:sp>
@@ -313,9 +299,9 @@
           <a:bodyPr/>
           <a:lstStyle/>
           <a:p>
-            <a:fld id="{241EB5C9-1307-BA42-ABA2-0BC069CD8E7F}" type="datetimeFigureOut">
-              <a:rPr lang="en-US" smtClean="0"/>
-              <a:t>1/2/22</a:t>
+            <a:fld id="{5BCAD085-E8A6-8845-BD4E-CB4CCA059FC4}" type="datetimeFigureOut">
+              <a:rPr lang="en-US" smtClean="0"/>
+              <a:t>1/27/13</a:t>
             </a:fld>
             <a:endParaRPr lang="en-US"/>
           </a:p>
@@ -355,7 +341,7 @@
           <a:bodyPr/>
           <a:lstStyle/>
           <a:p>
-            <a:fld id="{C5EF2332-01BF-834F-8236-50238282D533}" type="slidenum">
+            <a:fld id="{C1FF6DA9-008F-8B48-92A6-B652298478BF}" type="slidenum">
               <a:rPr lang="en-US" smtClean="0"/>
               <a:t>‹#›</a:t>
             </a:fld>
@@ -366,7 +352,7 @@
     </p:spTree>
     <p:extLst>
       <p:ext uri="{BB962C8B-B14F-4D97-AF65-F5344CB8AC3E}">
-        <p14:creationId xmlns:p14="http://schemas.microsoft.com/office/powerpoint/2010/main" val="1444357513"/>
+        <p14:creationId xmlns:p14="http://schemas.microsoft.com/office/powerpoint/2010/main" val="3168075583"/>
       </p:ext>
     </p:extLst>
   </p:cSld>
@@ -409,9 +395,10 @@
           <a:lstStyle/>
           <a:p>
             <a:r>
-              <a:rPr lang="en-US"/>
+              <a:rPr lang="en-US" smtClean="0"/>
               <a:t>Click to edit Master title style</a:t>
             </a:r>
+            <a:endParaRPr lang="en-US"/>
           </a:p>
         </p:txBody>
       </p:sp>
@@ -432,37 +419,38 @@
           <a:p>
             <a:pPr lvl="0"/>
             <a:r>
-              <a:rPr lang="en-US"/>
+              <a:rPr lang="en-US" smtClean="0"/>
               <a:t>Click to edit Master text styles</a:t>
             </a:r>
           </a:p>
           <a:p>
             <a:pPr lvl="1"/>
             <a:r>
-              <a:rPr lang="en-US"/>
+              <a:rPr lang="en-US" smtClean="0"/>
               <a:t>Second level</a:t>
             </a:r>
           </a:p>
           <a:p>
             <a:pPr lvl="2"/>
             <a:r>
-              <a:rPr lang="en-US"/>
+              <a:rPr lang="en-US" smtClean="0"/>
               <a:t>Third level</a:t>
             </a:r>
           </a:p>
           <a:p>
             <a:pPr lvl="3"/>
             <a:r>
-              <a:rPr lang="en-US"/>
+              <a:rPr lang="en-US" smtClean="0"/>
               <a:t>Fourth level</a:t>
             </a:r>
           </a:p>
           <a:p>
             <a:pPr lvl="4"/>
             <a:r>
-              <a:rPr lang="en-US"/>
+              <a:rPr lang="en-US" smtClean="0"/>
               <a:t>Fifth level</a:t>
             </a:r>
+            <a:endParaRPr lang="en-US"/>
           </a:p>
         </p:txBody>
       </p:sp>
@@ -481,9 +469,9 @@
           <a:bodyPr/>
           <a:lstStyle/>
           <a:p>
-            <a:fld id="{241EB5C9-1307-BA42-ABA2-0BC069CD8E7F}" type="datetimeFigureOut">
-              <a:rPr lang="en-US" smtClean="0"/>
-              <a:t>1/2/22</a:t>
+            <a:fld id="{5BCAD085-E8A6-8845-BD4E-CB4CCA059FC4}" type="datetimeFigureOut">
+              <a:rPr lang="en-US" smtClean="0"/>
+              <a:t>1/27/13</a:t>
             </a:fld>
             <a:endParaRPr lang="en-US"/>
           </a:p>
@@ -523,7 +511,7 @@
           <a:bodyPr/>
           <a:lstStyle/>
           <a:p>
-            <a:fld id="{C5EF2332-01BF-834F-8236-50238282D533}" type="slidenum">
+            <a:fld id="{C1FF6DA9-008F-8B48-92A6-B652298478BF}" type="slidenum">
               <a:rPr lang="en-US" smtClean="0"/>
               <a:t>‹#›</a:t>
             </a:fld>
@@ -534,7 +522,7 @@
     </p:spTree>
     <p:extLst>
       <p:ext uri="{BB962C8B-B14F-4D97-AF65-F5344CB8AC3E}">
-        <p14:creationId xmlns:p14="http://schemas.microsoft.com/office/powerpoint/2010/main" val="313914798"/>
+        <p14:creationId xmlns:p14="http://schemas.microsoft.com/office/powerpoint/2010/main" val="2910927964"/>
       </p:ext>
     </p:extLst>
   </p:cSld>
@@ -573,8 +561,8 @@
         </p:nvSpPr>
         <p:spPr>
           <a:xfrm>
-            <a:off x="6629400" y="205979"/>
-            <a:ext cx="2057400" cy="4388644"/>
+            <a:off x="6629400" y="274638"/>
+            <a:ext cx="2057400" cy="5851525"/>
           </a:xfrm>
         </p:spPr>
         <p:txBody>
@@ -582,9 +570,10 @@
           <a:lstStyle/>
           <a:p>
             <a:r>
-              <a:rPr lang="en-US"/>
+              <a:rPr lang="en-US" smtClean="0"/>
               <a:t>Click to edit Master title style</a:t>
             </a:r>
+            <a:endParaRPr lang="en-US"/>
           </a:p>
         </p:txBody>
       </p:sp>
@@ -600,8 +589,8 @@
         </p:nvSpPr>
         <p:spPr>
           <a:xfrm>
-            <a:off x="457200" y="205979"/>
-            <a:ext cx="6019800" cy="4388644"/>
+            <a:off x="457200" y="274638"/>
+            <a:ext cx="6019800" cy="5851525"/>
           </a:xfrm>
         </p:spPr>
         <p:txBody>
@@ -610,37 +599,38 @@
           <a:p>
             <a:pPr lvl="0"/>
             <a:r>
-              <a:rPr lang="en-US"/>
+              <a:rPr lang="en-US" smtClean="0"/>
               <a:t>Click to edit Master text styles</a:t>
             </a:r>
           </a:p>
           <a:p>
             <a:pPr lvl="1"/>
             <a:r>
-              <a:rPr lang="en-US"/>
+              <a:rPr lang="en-US" smtClean="0"/>
               <a:t>Second level</a:t>
             </a:r>
           </a:p>
           <a:p>
             <a:pPr lvl="2"/>
             <a:r>
-              <a:rPr lang="en-US"/>
+              <a:rPr lang="en-US" smtClean="0"/>
               <a:t>Third level</a:t>
             </a:r>
           </a:p>
           <a:p>
             <a:pPr lvl="3"/>
             <a:r>
-              <a:rPr lang="en-US"/>
+              <a:rPr lang="en-US" smtClean="0"/>
               <a:t>Fourth level</a:t>
             </a:r>
           </a:p>
           <a:p>
             <a:pPr lvl="4"/>
             <a:r>
-              <a:rPr lang="en-US"/>
+              <a:rPr lang="en-US" smtClean="0"/>
               <a:t>Fifth level</a:t>
             </a:r>
+            <a:endParaRPr lang="en-US"/>
           </a:p>
         </p:txBody>
       </p:sp>
@@ -659,9 +649,9 @@
           <a:bodyPr/>
           <a:lstStyle/>
           <a:p>
-            <a:fld id="{241EB5C9-1307-BA42-ABA2-0BC069CD8E7F}" type="datetimeFigureOut">
-              <a:rPr lang="en-US" smtClean="0"/>
-              <a:t>1/2/22</a:t>
+            <a:fld id="{5BCAD085-E8A6-8845-BD4E-CB4CCA059FC4}" type="datetimeFigureOut">
+              <a:rPr lang="en-US" smtClean="0"/>
+              <a:t>1/27/13</a:t>
             </a:fld>
             <a:endParaRPr lang="en-US"/>
           </a:p>
@@ -701,7 +691,7 @@
           <a:bodyPr/>
           <a:lstStyle/>
           <a:p>
-            <a:fld id="{C5EF2332-01BF-834F-8236-50238282D533}" type="slidenum">
+            <a:fld id="{C1FF6DA9-008F-8B48-92A6-B652298478BF}" type="slidenum">
               <a:rPr lang="en-US" smtClean="0"/>
               <a:t>‹#›</a:t>
             </a:fld>
@@ -712,7 +702,7 @@
     </p:spTree>
     <p:extLst>
       <p:ext uri="{BB962C8B-B14F-4D97-AF65-F5344CB8AC3E}">
-        <p14:creationId xmlns:p14="http://schemas.microsoft.com/office/powerpoint/2010/main" val="2581529045"/>
+        <p14:creationId xmlns:p14="http://schemas.microsoft.com/office/powerpoint/2010/main" val="3612223792"/>
       </p:ext>
     </p:extLst>
   </p:cSld>
@@ -755,9 +745,10 @@
           <a:lstStyle/>
           <a:p>
             <a:r>
-              <a:rPr lang="en-US"/>
+              <a:rPr lang="en-US" smtClean="0"/>
               <a:t>Click to edit Master title style</a:t>
             </a:r>
+            <a:endParaRPr lang="en-US"/>
           </a:p>
         </p:txBody>
       </p:sp>
@@ -778,37 +769,38 @@
           <a:p>
             <a:pPr lvl="0"/>
             <a:r>
-              <a:rPr lang="en-US"/>
+              <a:rPr lang="en-US" smtClean="0"/>
               <a:t>Click to edit Master text styles</a:t>
             </a:r>
           </a:p>
           <a:p>
             <a:pPr lvl="1"/>
             <a:r>
-              <a:rPr lang="en-US"/>
+              <a:rPr lang="en-US" smtClean="0"/>
               <a:t>Second level</a:t>
             </a:r>
           </a:p>
           <a:p>
             <a:pPr lvl="2"/>
             <a:r>
-              <a:rPr lang="en-US"/>
+              <a:rPr lang="en-US" smtClean="0"/>
               <a:t>Third level</a:t>
             </a:r>
           </a:p>
           <a:p>
             <a:pPr lvl="3"/>
             <a:r>
-              <a:rPr lang="en-US"/>
+              <a:rPr lang="en-US" smtClean="0"/>
               <a:t>Fourth level</a:t>
             </a:r>
           </a:p>
           <a:p>
             <a:pPr lvl="4"/>
             <a:r>
-              <a:rPr lang="en-US"/>
+              <a:rPr lang="en-US" smtClean="0"/>
               <a:t>Fifth level</a:t>
             </a:r>
+            <a:endParaRPr lang="en-US"/>
           </a:p>
         </p:txBody>
       </p:sp>
@@ -827,9 +819,9 @@
           <a:bodyPr/>
           <a:lstStyle/>
           <a:p>
-            <a:fld id="{241EB5C9-1307-BA42-ABA2-0BC069CD8E7F}" type="datetimeFigureOut">
-              <a:rPr lang="en-US" smtClean="0"/>
-              <a:t>1/2/22</a:t>
+            <a:fld id="{5BCAD085-E8A6-8845-BD4E-CB4CCA059FC4}" type="datetimeFigureOut">
+              <a:rPr lang="en-US" smtClean="0"/>
+              <a:t>1/27/13</a:t>
             </a:fld>
             <a:endParaRPr lang="en-US"/>
           </a:p>
@@ -869,7 +861,7 @@
           <a:bodyPr/>
           <a:lstStyle/>
           <a:p>
-            <a:fld id="{C5EF2332-01BF-834F-8236-50238282D533}" type="slidenum">
+            <a:fld id="{C1FF6DA9-008F-8B48-92A6-B652298478BF}" type="slidenum">
               <a:rPr lang="en-US" smtClean="0"/>
               <a:t>‹#›</a:t>
             </a:fld>
@@ -880,7 +872,7 @@
     </p:spTree>
     <p:extLst>
       <p:ext uri="{BB962C8B-B14F-4D97-AF65-F5344CB8AC3E}">
-        <p14:creationId xmlns:p14="http://schemas.microsoft.com/office/powerpoint/2010/main" val="338346009"/>
+        <p14:creationId xmlns:p14="http://schemas.microsoft.com/office/powerpoint/2010/main" val="2614314258"/>
       </p:ext>
     </p:extLst>
   </p:cSld>
@@ -919,22 +911,23 @@
         </p:nvSpPr>
         <p:spPr>
           <a:xfrm>
-            <a:off x="722313" y="3305176"/>
-            <a:ext cx="7772400" cy="1021556"/>
+            <a:off x="722313" y="4406900"/>
+            <a:ext cx="7772400" cy="1362075"/>
           </a:xfrm>
         </p:spPr>
         <p:txBody>
           <a:bodyPr anchor="t"/>
           <a:lstStyle>
             <a:lvl1pPr algn="l">
-              <a:defRPr sz="3000" b="1" cap="all"/>
+              <a:defRPr sz="4000" b="1" cap="all"/>
             </a:lvl1pPr>
           </a:lstStyle>
           <a:p>
             <a:r>
-              <a:rPr lang="en-US"/>
+              <a:rPr lang="en-US" smtClean="0"/>
               <a:t>Click to edit Master title style</a:t>
             </a:r>
+            <a:endParaRPr lang="en-US"/>
           </a:p>
         </p:txBody>
       </p:sp>
@@ -950,8 +943,8 @@
         </p:nvSpPr>
         <p:spPr>
           <a:xfrm>
-            <a:off x="722313" y="2180035"/>
-            <a:ext cx="7772400" cy="1125140"/>
+            <a:off x="722313" y="2906713"/>
+            <a:ext cx="7772400" cy="1500187"/>
           </a:xfrm>
         </p:spPr>
         <p:txBody>
@@ -959,7 +952,7 @@
           <a:lstStyle>
             <a:lvl1pPr marL="0" indent="0">
               <a:buNone/>
-              <a:defRPr sz="1500">
+              <a:defRPr sz="2000">
                 <a:solidFill>
                   <a:schemeClr val="tx1">
                     <a:tint val="75000"/>
@@ -967,9 +960,9 @@
                 </a:solidFill>
               </a:defRPr>
             </a:lvl1pPr>
-            <a:lvl2pPr marL="342900" indent="0">
-              <a:buNone/>
-              <a:defRPr sz="1350">
+            <a:lvl2pPr marL="457200" indent="0">
+              <a:buNone/>
+              <a:defRPr sz="1800">
                 <a:solidFill>
                   <a:schemeClr val="tx1">
                     <a:tint val="75000"/>
@@ -977,9 +970,9 @@
                 </a:solidFill>
               </a:defRPr>
             </a:lvl2pPr>
-            <a:lvl3pPr marL="685800" indent="0">
-              <a:buNone/>
-              <a:defRPr sz="1200">
+            <a:lvl3pPr marL="914400" indent="0">
+              <a:buNone/>
+              <a:defRPr sz="1600">
                 <a:solidFill>
                   <a:schemeClr val="tx1">
                     <a:tint val="75000"/>
@@ -987,9 +980,9 @@
                 </a:solidFill>
               </a:defRPr>
             </a:lvl3pPr>
-            <a:lvl4pPr marL="1028700" indent="0">
-              <a:buNone/>
-              <a:defRPr sz="1050">
+            <a:lvl4pPr marL="1371600" indent="0">
+              <a:buNone/>
+              <a:defRPr sz="1400">
                 <a:solidFill>
                   <a:schemeClr val="tx1">
                     <a:tint val="75000"/>
@@ -997,9 +990,9 @@
                 </a:solidFill>
               </a:defRPr>
             </a:lvl4pPr>
-            <a:lvl5pPr marL="1371600" indent="0">
-              <a:buNone/>
-              <a:defRPr sz="1050">
+            <a:lvl5pPr marL="1828800" indent="0">
+              <a:buNone/>
+              <a:defRPr sz="1400">
                 <a:solidFill>
                   <a:schemeClr val="tx1">
                     <a:tint val="75000"/>
@@ -1007,9 +1000,9 @@
                 </a:solidFill>
               </a:defRPr>
             </a:lvl5pPr>
-            <a:lvl6pPr marL="1714500" indent="0">
-              <a:buNone/>
-              <a:defRPr sz="1050">
+            <a:lvl6pPr marL="2286000" indent="0">
+              <a:buNone/>
+              <a:defRPr sz="1400">
                 <a:solidFill>
                   <a:schemeClr val="tx1">
                     <a:tint val="75000"/>
@@ -1017,9 +1010,9 @@
                 </a:solidFill>
               </a:defRPr>
             </a:lvl6pPr>
-            <a:lvl7pPr marL="2057400" indent="0">
-              <a:buNone/>
-              <a:defRPr sz="1050">
+            <a:lvl7pPr marL="2743200" indent="0">
+              <a:buNone/>
+              <a:defRPr sz="1400">
                 <a:solidFill>
                   <a:schemeClr val="tx1">
                     <a:tint val="75000"/>
@@ -1027,9 +1020,9 @@
                 </a:solidFill>
               </a:defRPr>
             </a:lvl7pPr>
-            <a:lvl8pPr marL="2400300" indent="0">
-              <a:buNone/>
-              <a:defRPr sz="1050">
+            <a:lvl8pPr marL="3200400" indent="0">
+              <a:buNone/>
+              <a:defRPr sz="1400">
                 <a:solidFill>
                   <a:schemeClr val="tx1">
                     <a:tint val="75000"/>
@@ -1037,9 +1030,9 @@
                 </a:solidFill>
               </a:defRPr>
             </a:lvl8pPr>
-            <a:lvl9pPr marL="2743200" indent="0">
-              <a:buNone/>
-              <a:defRPr sz="1050">
+            <a:lvl9pPr marL="3657600" indent="0">
+              <a:buNone/>
+              <a:defRPr sz="1400">
                 <a:solidFill>
                   <a:schemeClr val="tx1">
                     <a:tint val="75000"/>
@@ -1051,7 +1044,7 @@
           <a:p>
             <a:pPr lvl="0"/>
             <a:r>
-              <a:rPr lang="en-US"/>
+              <a:rPr lang="en-US" smtClean="0"/>
               <a:t>Click to edit Master text styles</a:t>
             </a:r>
           </a:p>
@@ -1072,9 +1065,9 @@
           <a:bodyPr/>
           <a:lstStyle/>
           <a:p>
-            <a:fld id="{241EB5C9-1307-BA42-ABA2-0BC069CD8E7F}" type="datetimeFigureOut">
-              <a:rPr lang="en-US" smtClean="0"/>
-              <a:t>1/2/22</a:t>
+            <a:fld id="{5BCAD085-E8A6-8845-BD4E-CB4CCA059FC4}" type="datetimeFigureOut">
+              <a:rPr lang="en-US" smtClean="0"/>
+              <a:t>1/27/13</a:t>
             </a:fld>
             <a:endParaRPr lang="en-US"/>
           </a:p>
@@ -1114,7 +1107,7 @@
           <a:bodyPr/>
           <a:lstStyle/>
           <a:p>
-            <a:fld id="{C5EF2332-01BF-834F-8236-50238282D533}" type="slidenum">
+            <a:fld id="{C1FF6DA9-008F-8B48-92A6-B652298478BF}" type="slidenum">
               <a:rPr lang="en-US" smtClean="0"/>
               <a:t>‹#›</a:t>
             </a:fld>
@@ -1125,7 +1118,7 @@
     </p:spTree>
     <p:extLst>
       <p:ext uri="{BB962C8B-B14F-4D97-AF65-F5344CB8AC3E}">
-        <p14:creationId xmlns:p14="http://schemas.microsoft.com/office/powerpoint/2010/main" val="1073069076"/>
+        <p14:creationId xmlns:p14="http://schemas.microsoft.com/office/powerpoint/2010/main" val="960648375"/>
       </p:ext>
     </p:extLst>
   </p:cSld>
@@ -1168,9 +1161,10 @@
           <a:lstStyle/>
           <a:p>
             <a:r>
-              <a:rPr lang="en-US"/>
+              <a:rPr lang="en-US" smtClean="0"/>
               <a:t>Click to edit Master title style</a:t>
             </a:r>
+            <a:endParaRPr lang="en-US"/>
           </a:p>
         </p:txBody>
       </p:sp>
@@ -1186,75 +1180,76 @@
         </p:nvSpPr>
         <p:spPr>
           <a:xfrm>
-            <a:off x="457200" y="1200151"/>
-            <a:ext cx="4038600" cy="3394472"/>
+            <a:off x="457200" y="1600200"/>
+            <a:ext cx="4038600" cy="4525963"/>
           </a:xfrm>
         </p:spPr>
         <p:txBody>
           <a:bodyPr/>
           <a:lstStyle>
             <a:lvl1pPr>
-              <a:defRPr sz="2100"/>
+              <a:defRPr sz="2800"/>
             </a:lvl1pPr>
             <a:lvl2pPr>
-              <a:defRPr sz="1800"/>
+              <a:defRPr sz="2400"/>
             </a:lvl2pPr>
             <a:lvl3pPr>
-              <a:defRPr sz="1500"/>
+              <a:defRPr sz="2000"/>
             </a:lvl3pPr>
             <a:lvl4pPr>
-              <a:defRPr sz="1350"/>
+              <a:defRPr sz="1800"/>
             </a:lvl4pPr>
             <a:lvl5pPr>
-              <a:defRPr sz="1350"/>
+              <a:defRPr sz="1800"/>
             </a:lvl5pPr>
             <a:lvl6pPr>
-              <a:defRPr sz="1350"/>
+              <a:defRPr sz="1800"/>
             </a:lvl6pPr>
             <a:lvl7pPr>
-              <a:defRPr sz="1350"/>
+              <a:defRPr sz="1800"/>
             </a:lvl7pPr>
             <a:lvl8pPr>
-              <a:defRPr sz="1350"/>
+              <a:defRPr sz="1800"/>
             </a:lvl8pPr>
             <a:lvl9pPr>
-              <a:defRPr sz="1350"/>
+              <a:defRPr sz="1800"/>
             </a:lvl9pPr>
           </a:lstStyle>
           <a:p>
             <a:pPr lvl="0"/>
             <a:r>
-              <a:rPr lang="en-US"/>
+              <a:rPr lang="en-US" smtClean="0"/>
               <a:t>Click to edit Master text styles</a:t>
             </a:r>
           </a:p>
           <a:p>
             <a:pPr lvl="1"/>
             <a:r>
-              <a:rPr lang="en-US"/>
+              <a:rPr lang="en-US" smtClean="0"/>
               <a:t>Second level</a:t>
             </a:r>
           </a:p>
           <a:p>
             <a:pPr lvl="2"/>
             <a:r>
-              <a:rPr lang="en-US"/>
+              <a:rPr lang="en-US" smtClean="0"/>
               <a:t>Third level</a:t>
             </a:r>
           </a:p>
           <a:p>
             <a:pPr lvl="3"/>
             <a:r>
-              <a:rPr lang="en-US"/>
+              <a:rPr lang="en-US" smtClean="0"/>
               <a:t>Fourth level</a:t>
             </a:r>
           </a:p>
           <a:p>
             <a:pPr lvl="4"/>
             <a:r>
-              <a:rPr lang="en-US"/>
+              <a:rPr lang="en-US" smtClean="0"/>
               <a:t>Fifth level</a:t>
             </a:r>
+            <a:endParaRPr lang="en-US"/>
           </a:p>
         </p:txBody>
       </p:sp>
@@ -1270,75 +1265,76 @@
         </p:nvSpPr>
         <p:spPr>
           <a:xfrm>
-            <a:off x="4648200" y="1200151"/>
-            <a:ext cx="4038600" cy="3394472"/>
+            <a:off x="4648200" y="1600200"/>
+            <a:ext cx="4038600" cy="4525963"/>
           </a:xfrm>
         </p:spPr>
         <p:txBody>
           <a:bodyPr/>
           <a:lstStyle>
             <a:lvl1pPr>
-              <a:defRPr sz="2100"/>
+              <a:defRPr sz="2800"/>
             </a:lvl1pPr>
             <a:lvl2pPr>
-              <a:defRPr sz="1800"/>
+              <a:defRPr sz="2400"/>
             </a:lvl2pPr>
             <a:lvl3pPr>
-              <a:defRPr sz="1500"/>
+              <a:defRPr sz="2000"/>
             </a:lvl3pPr>
             <a:lvl4pPr>
-              <a:defRPr sz="1350"/>
+              <a:defRPr sz="1800"/>
             </a:lvl4pPr>
             <a:lvl5pPr>
-              <a:defRPr sz="1350"/>
+              <a:defRPr sz="1800"/>
             </a:lvl5pPr>
             <a:lvl6pPr>
-              <a:defRPr sz="1350"/>
+              <a:defRPr sz="1800"/>
             </a:lvl6pPr>
             <a:lvl7pPr>
-              <a:defRPr sz="1350"/>
+              <a:defRPr sz="1800"/>
             </a:lvl7pPr>
             <a:lvl8pPr>
-              <a:defRPr sz="1350"/>
+              <a:defRPr sz="1800"/>
             </a:lvl8pPr>
             <a:lvl9pPr>
-              <a:defRPr sz="1350"/>
+              <a:defRPr sz="1800"/>
             </a:lvl9pPr>
           </a:lstStyle>
           <a:p>
             <a:pPr lvl="0"/>
             <a:r>
-              <a:rPr lang="en-US"/>
+              <a:rPr lang="en-US" smtClean="0"/>
               <a:t>Click to edit Master text styles</a:t>
             </a:r>
           </a:p>
           <a:p>
             <a:pPr lvl="1"/>
             <a:r>
-              <a:rPr lang="en-US"/>
+              <a:rPr lang="en-US" smtClean="0"/>
               <a:t>Second level</a:t>
             </a:r>
           </a:p>
           <a:p>
             <a:pPr lvl="2"/>
             <a:r>
-              <a:rPr lang="en-US"/>
+              <a:rPr lang="en-US" smtClean="0"/>
               <a:t>Third level</a:t>
             </a:r>
           </a:p>
           <a:p>
             <a:pPr lvl="3"/>
             <a:r>
-              <a:rPr lang="en-US"/>
+              <a:rPr lang="en-US" smtClean="0"/>
               <a:t>Fourth level</a:t>
             </a:r>
           </a:p>
           <a:p>
             <a:pPr lvl="4"/>
             <a:r>
-              <a:rPr lang="en-US"/>
+              <a:rPr lang="en-US" smtClean="0"/>
               <a:t>Fifth level</a:t>
             </a:r>
+            <a:endParaRPr lang="en-US"/>
           </a:p>
         </p:txBody>
       </p:sp>
@@ -1357,9 +1353,9 @@
           <a:bodyPr/>
           <a:lstStyle/>
           <a:p>
-            <a:fld id="{241EB5C9-1307-BA42-ABA2-0BC069CD8E7F}" type="datetimeFigureOut">
-              <a:rPr lang="en-US" smtClean="0"/>
-              <a:t>1/2/22</a:t>
+            <a:fld id="{5BCAD085-E8A6-8845-BD4E-CB4CCA059FC4}" type="datetimeFigureOut">
+              <a:rPr lang="en-US" smtClean="0"/>
+              <a:t>1/27/13</a:t>
             </a:fld>
             <a:endParaRPr lang="en-US"/>
           </a:p>
@@ -1399,7 +1395,7 @@
           <a:bodyPr/>
           <a:lstStyle/>
           <a:p>
-            <a:fld id="{C5EF2332-01BF-834F-8236-50238282D533}" type="slidenum">
+            <a:fld id="{C1FF6DA9-008F-8B48-92A6-B652298478BF}" type="slidenum">
               <a:rPr lang="en-US" smtClean="0"/>
               <a:t>‹#›</a:t>
             </a:fld>
@@ -1410,7 +1406,7 @@
     </p:spTree>
     <p:extLst>
       <p:ext uri="{BB962C8B-B14F-4D97-AF65-F5344CB8AC3E}">
-        <p14:creationId xmlns:p14="http://schemas.microsoft.com/office/powerpoint/2010/main" val="2619886245"/>
+        <p14:creationId xmlns:p14="http://schemas.microsoft.com/office/powerpoint/2010/main" val="2782244947"/>
       </p:ext>
     </p:extLst>
   </p:cSld>
@@ -1457,9 +1453,10 @@
           </a:lstStyle>
           <a:p>
             <a:r>
-              <a:rPr lang="en-US"/>
+              <a:rPr lang="en-US" smtClean="0"/>
               <a:t>Click to edit Master title style</a:t>
             </a:r>
+            <a:endParaRPr lang="en-US"/>
           </a:p>
         </p:txBody>
       </p:sp>
@@ -1475,8 +1472,8 @@
         </p:nvSpPr>
         <p:spPr>
           <a:xfrm>
-            <a:off x="457200" y="1151335"/>
-            <a:ext cx="4040188" cy="479822"/>
+            <a:off x="457200" y="1535113"/>
+            <a:ext cx="4040188" cy="639762"/>
           </a:xfrm>
         </p:spPr>
         <p:txBody>
@@ -1484,45 +1481,45 @@
           <a:lstStyle>
             <a:lvl1pPr marL="0" indent="0">
               <a:buNone/>
+              <a:defRPr sz="2400" b="1"/>
+            </a:lvl1pPr>
+            <a:lvl2pPr marL="457200" indent="0">
+              <a:buNone/>
+              <a:defRPr sz="2000" b="1"/>
+            </a:lvl2pPr>
+            <a:lvl3pPr marL="914400" indent="0">
+              <a:buNone/>
               <a:defRPr sz="1800" b="1"/>
-            </a:lvl1pPr>
-            <a:lvl2pPr marL="342900" indent="0">
-              <a:buNone/>
-              <a:defRPr sz="1500" b="1"/>
-            </a:lvl2pPr>
-            <a:lvl3pPr marL="685800" indent="0">
-              <a:buNone/>
-              <a:defRPr sz="1350" b="1"/>
             </a:lvl3pPr>
-            <a:lvl4pPr marL="1028700" indent="0">
-              <a:buNone/>
-              <a:defRPr sz="1200" b="1"/>
+            <a:lvl4pPr marL="1371600" indent="0">
+              <a:buNone/>
+              <a:defRPr sz="1600" b="1"/>
             </a:lvl4pPr>
-            <a:lvl5pPr marL="1371600" indent="0">
-              <a:buNone/>
-              <a:defRPr sz="1200" b="1"/>
+            <a:lvl5pPr marL="1828800" indent="0">
+              <a:buNone/>
+              <a:defRPr sz="1600" b="1"/>
             </a:lvl5pPr>
-            <a:lvl6pPr marL="1714500" indent="0">
-              <a:buNone/>
-              <a:defRPr sz="1200" b="1"/>
+            <a:lvl6pPr marL="2286000" indent="0">
+              <a:buNone/>
+              <a:defRPr sz="1600" b="1"/>
             </a:lvl6pPr>
-            <a:lvl7pPr marL="2057400" indent="0">
-              <a:buNone/>
-              <a:defRPr sz="1200" b="1"/>
+            <a:lvl7pPr marL="2743200" indent="0">
+              <a:buNone/>
+              <a:defRPr sz="1600" b="1"/>
             </a:lvl7pPr>
-            <a:lvl8pPr marL="2400300" indent="0">
-              <a:buNone/>
-              <a:defRPr sz="1200" b="1"/>
+            <a:lvl8pPr marL="3200400" indent="0">
+              <a:buNone/>
+              <a:defRPr sz="1600" b="1"/>
             </a:lvl8pPr>
-            <a:lvl9pPr marL="2743200" indent="0">
-              <a:buNone/>
-              <a:defRPr sz="1200" b="1"/>
+            <a:lvl9pPr marL="3657600" indent="0">
+              <a:buNone/>
+              <a:defRPr sz="1600" b="1"/>
             </a:lvl9pPr>
           </a:lstStyle>
           <a:p>
             <a:pPr lvl="0"/>
             <a:r>
-              <a:rPr lang="en-US"/>
+              <a:rPr lang="en-US" smtClean="0"/>
               <a:t>Click to edit Master text styles</a:t>
             </a:r>
           </a:p>
@@ -1540,75 +1537,76 @@
         </p:nvSpPr>
         <p:spPr>
           <a:xfrm>
-            <a:off x="457200" y="1631156"/>
-            <a:ext cx="4040188" cy="2963466"/>
+            <a:off x="457200" y="2174875"/>
+            <a:ext cx="4040188" cy="3951288"/>
           </a:xfrm>
         </p:spPr>
         <p:txBody>
           <a:bodyPr/>
           <a:lstStyle>
             <a:lvl1pPr>
-              <a:defRPr sz="1800"/>
+              <a:defRPr sz="2400"/>
             </a:lvl1pPr>
             <a:lvl2pPr>
-              <a:defRPr sz="1500"/>
+              <a:defRPr sz="2000"/>
             </a:lvl2pPr>
             <a:lvl3pPr>
-              <a:defRPr sz="1350"/>
+              <a:defRPr sz="1800"/>
             </a:lvl3pPr>
             <a:lvl4pPr>
-              <a:defRPr sz="1200"/>
+              <a:defRPr sz="1600"/>
             </a:lvl4pPr>
             <a:lvl5pPr>
-              <a:defRPr sz="1200"/>
+              <a:defRPr sz="1600"/>
             </a:lvl5pPr>
             <a:lvl6pPr>
-              <a:defRPr sz="1200"/>
+              <a:defRPr sz="1600"/>
             </a:lvl6pPr>
             <a:lvl7pPr>
-              <a:defRPr sz="1200"/>
+              <a:defRPr sz="1600"/>
             </a:lvl7pPr>
             <a:lvl8pPr>
-              <a:defRPr sz="1200"/>
+              <a:defRPr sz="1600"/>
             </a:lvl8pPr>
             <a:lvl9pPr>
-              <a:defRPr sz="1200"/>
+              <a:defRPr sz="1600"/>
             </a:lvl9pPr>
           </a:lstStyle>
           <a:p>
             <a:pPr lvl="0"/>
             <a:r>
-              <a:rPr lang="en-US"/>
+              <a:rPr lang="en-US" smtClean="0"/>
               <a:t>Click to edit Master text styles</a:t>
             </a:r>
           </a:p>
           <a:p>
             <a:pPr lvl="1"/>
             <a:r>
-              <a:rPr lang="en-US"/>
+              <a:rPr lang="en-US" smtClean="0"/>
               <a:t>Second level</a:t>
             </a:r>
           </a:p>
           <a:p>
             <a:pPr lvl="2"/>
             <a:r>
-              <a:rPr lang="en-US"/>
+              <a:rPr lang="en-US" smtClean="0"/>
               <a:t>Third level</a:t>
             </a:r>
           </a:p>
           <a:p>
             <a:pPr lvl="3"/>
             <a:r>
-              <a:rPr lang="en-US"/>
+              <a:rPr lang="en-US" smtClean="0"/>
               <a:t>Fourth level</a:t>
             </a:r>
           </a:p>
           <a:p>
             <a:pPr lvl="4"/>
             <a:r>
-              <a:rPr lang="en-US"/>
+              <a:rPr lang="en-US" smtClean="0"/>
               <a:t>Fifth level</a:t>
             </a:r>
+            <a:endParaRPr lang="en-US"/>
           </a:p>
         </p:txBody>
       </p:sp>
@@ -1624,8 +1622,8 @@
         </p:nvSpPr>
         <p:spPr>
           <a:xfrm>
-            <a:off x="4645026" y="1151335"/>
-            <a:ext cx="4041775" cy="479822"/>
+            <a:off x="4645025" y="1535113"/>
+            <a:ext cx="4041775" cy="639762"/>
           </a:xfrm>
         </p:spPr>
         <p:txBody>
@@ -1633,45 +1631,45 @@
           <a:lstStyle>
             <a:lvl1pPr marL="0" indent="0">
               <a:buNone/>
+              <a:defRPr sz="2400" b="1"/>
+            </a:lvl1pPr>
+            <a:lvl2pPr marL="457200" indent="0">
+              <a:buNone/>
+              <a:defRPr sz="2000" b="1"/>
+            </a:lvl2pPr>
+            <a:lvl3pPr marL="914400" indent="0">
+              <a:buNone/>
               <a:defRPr sz="1800" b="1"/>
-            </a:lvl1pPr>
-            <a:lvl2pPr marL="342900" indent="0">
-              <a:buNone/>
-              <a:defRPr sz="1500" b="1"/>
-            </a:lvl2pPr>
-            <a:lvl3pPr marL="685800" indent="0">
-              <a:buNone/>
-              <a:defRPr sz="1350" b="1"/>
             </a:lvl3pPr>
-            <a:lvl4pPr marL="1028700" indent="0">
-              <a:buNone/>
-              <a:defRPr sz="1200" b="1"/>
+            <a:lvl4pPr marL="1371600" indent="0">
+              <a:buNone/>
+              <a:defRPr sz="1600" b="1"/>
             </a:lvl4pPr>
-            <a:lvl5pPr marL="1371600" indent="0">
-              <a:buNone/>
-              <a:defRPr sz="1200" b="1"/>
+            <a:lvl5pPr marL="1828800" indent="0">
+              <a:buNone/>
+              <a:defRPr sz="1600" b="1"/>
             </a:lvl5pPr>
-            <a:lvl6pPr marL="1714500" indent="0">
-              <a:buNone/>
-              <a:defRPr sz="1200" b="1"/>
+            <a:lvl6pPr marL="2286000" indent="0">
+              <a:buNone/>
+              <a:defRPr sz="1600" b="1"/>
             </a:lvl6pPr>
-            <a:lvl7pPr marL="2057400" indent="0">
-              <a:buNone/>
-              <a:defRPr sz="1200" b="1"/>
+            <a:lvl7pPr marL="2743200" indent="0">
+              <a:buNone/>
+              <a:defRPr sz="1600" b="1"/>
             </a:lvl7pPr>
-            <a:lvl8pPr marL="2400300" indent="0">
-              <a:buNone/>
-              <a:defRPr sz="1200" b="1"/>
+            <a:lvl8pPr marL="3200400" indent="0">
+              <a:buNone/>
+              <a:defRPr sz="1600" b="1"/>
             </a:lvl8pPr>
-            <a:lvl9pPr marL="2743200" indent="0">
-              <a:buNone/>
-              <a:defRPr sz="1200" b="1"/>
+            <a:lvl9pPr marL="3657600" indent="0">
+              <a:buNone/>
+              <a:defRPr sz="1600" b="1"/>
             </a:lvl9pPr>
           </a:lstStyle>
           <a:p>
             <a:pPr lvl="0"/>
             <a:r>
-              <a:rPr lang="en-US"/>
+              <a:rPr lang="en-US" smtClean="0"/>
               <a:t>Click to edit Master text styles</a:t>
             </a:r>
           </a:p>
@@ -1689,75 +1687,76 @@
         </p:nvSpPr>
         <p:spPr>
           <a:xfrm>
-            <a:off x="4645026" y="1631156"/>
-            <a:ext cx="4041775" cy="2963466"/>
+            <a:off x="4645025" y="2174875"/>
+            <a:ext cx="4041775" cy="3951288"/>
           </a:xfrm>
         </p:spPr>
         <p:txBody>
           <a:bodyPr/>
           <a:lstStyle>
             <a:lvl1pPr>
-              <a:defRPr sz="1800"/>
+              <a:defRPr sz="2400"/>
             </a:lvl1pPr>
             <a:lvl2pPr>
-              <a:defRPr sz="1500"/>
+              <a:defRPr sz="2000"/>
             </a:lvl2pPr>
             <a:lvl3pPr>
-              <a:defRPr sz="1350"/>
+              <a:defRPr sz="1800"/>
             </a:lvl3pPr>
             <a:lvl4pPr>
-              <a:defRPr sz="1200"/>
+              <a:defRPr sz="1600"/>
             </a:lvl4pPr>
             <a:lvl5pPr>
-              <a:defRPr sz="1200"/>
+              <a:defRPr sz="1600"/>
             </a:lvl5pPr>
             <a:lvl6pPr>
-              <a:defRPr sz="1200"/>
+              <a:defRPr sz="1600"/>
             </a:lvl6pPr>
             <a:lvl7pPr>
-              <a:defRPr sz="1200"/>
+              <a:defRPr sz="1600"/>
             </a:lvl7pPr>
             <a:lvl8pPr>
-              <a:defRPr sz="1200"/>
+              <a:defRPr sz="1600"/>
             </a:lvl8pPr>
             <a:lvl9pPr>
-              <a:defRPr sz="1200"/>
+              <a:defRPr sz="1600"/>
             </a:lvl9pPr>
           </a:lstStyle>
           <a:p>
             <a:pPr lvl="0"/>
             <a:r>
-              <a:rPr lang="en-US"/>
+              <a:rPr lang="en-US" smtClean="0"/>
               <a:t>Click to edit Master text styles</a:t>
             </a:r>
           </a:p>
           <a:p>
             <a:pPr lvl="1"/>
             <a:r>
-              <a:rPr lang="en-US"/>
+              <a:rPr lang="en-US" smtClean="0"/>
               <a:t>Second level</a:t>
             </a:r>
           </a:p>
           <a:p>
             <a:pPr lvl="2"/>
             <a:r>
-              <a:rPr lang="en-US"/>
+              <a:rPr lang="en-US" smtClean="0"/>
               <a:t>Third level</a:t>
             </a:r>
           </a:p>
           <a:p>
             <a:pPr lvl="3"/>
             <a:r>
-              <a:rPr lang="en-US"/>
+              <a:rPr lang="en-US" smtClean="0"/>
               <a:t>Fourth level</a:t>
             </a:r>
           </a:p>
           <a:p>
             <a:pPr lvl="4"/>
             <a:r>
-              <a:rPr lang="en-US"/>
+              <a:rPr lang="en-US" smtClean="0"/>
               <a:t>Fifth level</a:t>
             </a:r>
+            <a:endParaRPr lang="en-US"/>
           </a:p>
         </p:txBody>
       </p:sp>
@@ -1776,9 +1775,9 @@
           <a:bodyPr/>
           <a:lstStyle/>
           <a:p>
-            <a:fld id="{241EB5C9-1307-BA42-ABA2-0BC069CD8E7F}" type="datetimeFigureOut">
-              <a:rPr lang="en-US" smtClean="0"/>
-              <a:t>1/2/22</a:t>
+            <a:fld id="{5BCAD085-E8A6-8845-BD4E-CB4CCA059FC4}" type="datetimeFigureOut">
+              <a:rPr lang="en-US" smtClean="0"/>
+              <a:t>1/27/13</a:t>
             </a:fld>
             <a:endParaRPr lang="en-US"/>
           </a:p>
@@ -1818,7 +1817,7 @@
           <a:bodyPr/>
           <a:lstStyle/>
           <a:p>
-            <a:fld id="{C5EF2332-01BF-834F-8236-50238282D533}" type="slidenum">
+            <a:fld id="{C1FF6DA9-008F-8B48-92A6-B652298478BF}" type="slidenum">
               <a:rPr lang="en-US" smtClean="0"/>
               <a:t>‹#›</a:t>
             </a:fld>
@@ -1829,7 +1828,7 @@
     </p:spTree>
     <p:extLst>
       <p:ext uri="{BB962C8B-B14F-4D97-AF65-F5344CB8AC3E}">
-        <p14:creationId xmlns:p14="http://schemas.microsoft.com/office/powerpoint/2010/main" val="2535793967"/>
+        <p14:creationId xmlns:p14="http://schemas.microsoft.com/office/powerpoint/2010/main" val="990158736"/>
       </p:ext>
     </p:extLst>
   </p:cSld>
@@ -1872,9 +1871,10 @@
           <a:lstStyle/>
           <a:p>
             <a:r>
-              <a:rPr lang="en-US"/>
+              <a:rPr lang="en-US" smtClean="0"/>
               <a:t>Click to edit Master title style</a:t>
             </a:r>
+            <a:endParaRPr lang="en-US"/>
           </a:p>
         </p:txBody>
       </p:sp>
@@ -1893,9 +1893,9 @@
           <a:bodyPr/>
           <a:lstStyle/>
           <a:p>
-            <a:fld id="{241EB5C9-1307-BA42-ABA2-0BC069CD8E7F}" type="datetimeFigureOut">
-              <a:rPr lang="en-US" smtClean="0"/>
-              <a:t>1/2/22</a:t>
+            <a:fld id="{5BCAD085-E8A6-8845-BD4E-CB4CCA059FC4}" type="datetimeFigureOut">
+              <a:rPr lang="en-US" smtClean="0"/>
+              <a:t>1/27/13</a:t>
             </a:fld>
             <a:endParaRPr lang="en-US"/>
           </a:p>
@@ -1935,7 +1935,7 @@
           <a:bodyPr/>
           <a:lstStyle/>
           <a:p>
-            <a:fld id="{C5EF2332-01BF-834F-8236-50238282D533}" type="slidenum">
+            <a:fld id="{C1FF6DA9-008F-8B48-92A6-B652298478BF}" type="slidenum">
               <a:rPr lang="en-US" smtClean="0"/>
               <a:t>‹#›</a:t>
             </a:fld>
@@ -1946,7 +1946,7 @@
     </p:spTree>
     <p:extLst>
       <p:ext uri="{BB962C8B-B14F-4D97-AF65-F5344CB8AC3E}">
-        <p14:creationId xmlns:p14="http://schemas.microsoft.com/office/powerpoint/2010/main" val="3472721253"/>
+        <p14:creationId xmlns:p14="http://schemas.microsoft.com/office/powerpoint/2010/main" val="727027711"/>
       </p:ext>
     </p:extLst>
   </p:cSld>
@@ -1988,9 +1988,9 @@
           <a:bodyPr/>
           <a:lstStyle/>
           <a:p>
-            <a:fld id="{241EB5C9-1307-BA42-ABA2-0BC069CD8E7F}" type="datetimeFigureOut">
-              <a:rPr lang="en-US" smtClean="0"/>
-              <a:t>1/2/22</a:t>
+            <a:fld id="{5BCAD085-E8A6-8845-BD4E-CB4CCA059FC4}" type="datetimeFigureOut">
+              <a:rPr lang="en-US" smtClean="0"/>
+              <a:t>1/27/13</a:t>
             </a:fld>
             <a:endParaRPr lang="en-US"/>
           </a:p>
@@ -2030,7 +2030,7 @@
           <a:bodyPr/>
           <a:lstStyle/>
           <a:p>
-            <a:fld id="{C5EF2332-01BF-834F-8236-50238282D533}" type="slidenum">
+            <a:fld id="{C1FF6DA9-008F-8B48-92A6-B652298478BF}" type="slidenum">
               <a:rPr lang="en-US" smtClean="0"/>
               <a:t>‹#›</a:t>
             </a:fld>
@@ -2041,7 +2041,7 @@
     </p:spTree>
     <p:extLst>
       <p:ext uri="{BB962C8B-B14F-4D97-AF65-F5344CB8AC3E}">
-        <p14:creationId xmlns:p14="http://schemas.microsoft.com/office/powerpoint/2010/main" val="2130901097"/>
+        <p14:creationId xmlns:p14="http://schemas.microsoft.com/office/powerpoint/2010/main" val="1212999818"/>
       </p:ext>
     </p:extLst>
   </p:cSld>
@@ -2080,22 +2080,23 @@
         </p:nvSpPr>
         <p:spPr>
           <a:xfrm>
-            <a:off x="457201" y="204787"/>
-            <a:ext cx="3008313" cy="871538"/>
+            <a:off x="457200" y="273050"/>
+            <a:ext cx="3008313" cy="1162050"/>
           </a:xfrm>
         </p:spPr>
         <p:txBody>
           <a:bodyPr anchor="b"/>
           <a:lstStyle>
             <a:lvl1pPr algn="l">
-              <a:defRPr sz="1500" b="1"/>
+              <a:defRPr sz="2000" b="1"/>
             </a:lvl1pPr>
           </a:lstStyle>
           <a:p>
             <a:r>
-              <a:rPr lang="en-US"/>
+              <a:rPr lang="en-US" smtClean="0"/>
               <a:t>Click to edit Master title style</a:t>
             </a:r>
+            <a:endParaRPr lang="en-US"/>
           </a:p>
         </p:txBody>
       </p:sp>
@@ -2111,75 +2112,76 @@
         </p:nvSpPr>
         <p:spPr>
           <a:xfrm>
-            <a:off x="3575050" y="204788"/>
-            <a:ext cx="5111750" cy="4389835"/>
+            <a:off x="3575050" y="273050"/>
+            <a:ext cx="5111750" cy="5853113"/>
           </a:xfrm>
         </p:spPr>
         <p:txBody>
           <a:bodyPr/>
           <a:lstStyle>
             <a:lvl1pPr>
-              <a:defRPr sz="2400"/>
+              <a:defRPr sz="3200"/>
             </a:lvl1pPr>
             <a:lvl2pPr>
-              <a:defRPr sz="2100"/>
+              <a:defRPr sz="2800"/>
             </a:lvl2pPr>
             <a:lvl3pPr>
-              <a:defRPr sz="1800"/>
+              <a:defRPr sz="2400"/>
             </a:lvl3pPr>
             <a:lvl4pPr>
-              <a:defRPr sz="1500"/>
+              <a:defRPr sz="2000"/>
             </a:lvl4pPr>
             <a:lvl5pPr>
-              <a:defRPr sz="1500"/>
+              <a:defRPr sz="2000"/>
             </a:lvl5pPr>
             <a:lvl6pPr>
-              <a:defRPr sz="1500"/>
+              <a:defRPr sz="2000"/>
             </a:lvl6pPr>
             <a:lvl7pPr>
-              <a:defRPr sz="1500"/>
+              <a:defRPr sz="2000"/>
             </a:lvl7pPr>
             <a:lvl8pPr>
-              <a:defRPr sz="1500"/>
+              <a:defRPr sz="2000"/>
             </a:lvl8pPr>
             <a:lvl9pPr>
-              <a:defRPr sz="1500"/>
+              <a:defRPr sz="2000"/>
             </a:lvl9pPr>
           </a:lstStyle>
           <a:p>
             <a:pPr lvl="0"/>
             <a:r>
-              <a:rPr lang="en-US"/>
+              <a:rPr lang="en-US" smtClean="0"/>
               <a:t>Click to edit Master text styles</a:t>
             </a:r>
           </a:p>
           <a:p>
             <a:pPr lvl="1"/>
             <a:r>
-              <a:rPr lang="en-US"/>
+              <a:rPr lang="en-US" smtClean="0"/>
               <a:t>Second level</a:t>
             </a:r>
           </a:p>
           <a:p>
             <a:pPr lvl="2"/>
             <a:r>
-              <a:rPr lang="en-US"/>
+              <a:rPr lang="en-US" smtClean="0"/>
               <a:t>Third level</a:t>
             </a:r>
           </a:p>
           <a:p>
             <a:pPr lvl="3"/>
             <a:r>
-              <a:rPr lang="en-US"/>
+              <a:rPr lang="en-US" smtClean="0"/>
               <a:t>Fourth level</a:t>
             </a:r>
           </a:p>
           <a:p>
             <a:pPr lvl="4"/>
             <a:r>
-              <a:rPr lang="en-US"/>
+              <a:rPr lang="en-US" smtClean="0"/>
               <a:t>Fifth level</a:t>
             </a:r>
+            <a:endParaRPr lang="en-US"/>
           </a:p>
         </p:txBody>
       </p:sp>
@@ -2195,8 +2197,8 @@
         </p:nvSpPr>
         <p:spPr>
           <a:xfrm>
-            <a:off x="457201" y="1076326"/>
-            <a:ext cx="3008313" cy="3518297"/>
+            <a:off x="457200" y="1435100"/>
+            <a:ext cx="3008313" cy="4691063"/>
           </a:xfrm>
         </p:spPr>
         <p:txBody>
@@ -2204,45 +2206,45 @@
           <a:lstStyle>
             <a:lvl1pPr marL="0" indent="0">
               <a:buNone/>
-              <a:defRPr sz="1050"/>
+              <a:defRPr sz="1400"/>
             </a:lvl1pPr>
-            <a:lvl2pPr marL="342900" indent="0">
+            <a:lvl2pPr marL="457200" indent="0">
+              <a:buNone/>
+              <a:defRPr sz="1200"/>
+            </a:lvl2pPr>
+            <a:lvl3pPr marL="914400" indent="0">
+              <a:buNone/>
+              <a:defRPr sz="1000"/>
+            </a:lvl3pPr>
+            <a:lvl4pPr marL="1371600" indent="0">
               <a:buNone/>
               <a:defRPr sz="900"/>
-            </a:lvl2pPr>
-            <a:lvl3pPr marL="685800" indent="0">
-              <a:buNone/>
-              <a:defRPr sz="750"/>
-            </a:lvl3pPr>
-            <a:lvl4pPr marL="1028700" indent="0">
-              <a:buNone/>
-              <a:defRPr sz="675"/>
             </a:lvl4pPr>
-            <a:lvl5pPr marL="1371600" indent="0">
-              <a:buNone/>
-              <a:defRPr sz="675"/>
+            <a:lvl5pPr marL="1828800" indent="0">
+              <a:buNone/>
+              <a:defRPr sz="900"/>
             </a:lvl5pPr>
-            <a:lvl6pPr marL="1714500" indent="0">
-              <a:buNone/>
-              <a:defRPr sz="675"/>
+            <a:lvl6pPr marL="2286000" indent="0">
+              <a:buNone/>
+              <a:defRPr sz="900"/>
             </a:lvl6pPr>
-            <a:lvl7pPr marL="2057400" indent="0">
-              <a:buNone/>
-              <a:defRPr sz="675"/>
+            <a:lvl7pPr marL="2743200" indent="0">
+              <a:buNone/>
+              <a:defRPr sz="900"/>
             </a:lvl7pPr>
-            <a:lvl8pPr marL="2400300" indent="0">
-              <a:buNone/>
-              <a:defRPr sz="675"/>
+            <a:lvl8pPr marL="3200400" indent="0">
+              <a:buNone/>
+              <a:defRPr sz="900"/>
             </a:lvl8pPr>
-            <a:lvl9pPr marL="2743200" indent="0">
-              <a:buNone/>
-              <a:defRPr sz="675"/>
+            <a:lvl9pPr marL="3657600" indent="0">
+              <a:buNone/>
+              <a:defRPr sz="900"/>
             </a:lvl9pPr>
           </a:lstStyle>
           <a:p>
             <a:pPr lvl="0"/>
             <a:r>
-              <a:rPr lang="en-US"/>
+              <a:rPr lang="en-US" smtClean="0"/>
               <a:t>Click to edit Master text styles</a:t>
             </a:r>
           </a:p>
@@ -2263,9 +2265,9 @@
           <a:bodyPr/>
           <a:lstStyle/>
           <a:p>
-            <a:fld id="{241EB5C9-1307-BA42-ABA2-0BC069CD8E7F}" type="datetimeFigureOut">
-              <a:rPr lang="en-US" smtClean="0"/>
-              <a:t>1/2/22</a:t>
+            <a:fld id="{5BCAD085-E8A6-8845-BD4E-CB4CCA059FC4}" type="datetimeFigureOut">
+              <a:rPr lang="en-US" smtClean="0"/>
+              <a:t>1/27/13</a:t>
             </a:fld>
             <a:endParaRPr lang="en-US"/>
           </a:p>
@@ -2305,7 +2307,7 @@
           <a:bodyPr/>
           <a:lstStyle/>
           <a:p>
-            <a:fld id="{C5EF2332-01BF-834F-8236-50238282D533}" type="slidenum">
+            <a:fld id="{C1FF6DA9-008F-8B48-92A6-B652298478BF}" type="slidenum">
               <a:rPr lang="en-US" smtClean="0"/>
               <a:t>‹#›</a:t>
             </a:fld>
@@ -2316,7 +2318,7 @@
     </p:spTree>
     <p:extLst>
       <p:ext uri="{BB962C8B-B14F-4D97-AF65-F5344CB8AC3E}">
-        <p14:creationId xmlns:p14="http://schemas.microsoft.com/office/powerpoint/2010/main" val="3540895647"/>
+        <p14:creationId xmlns:p14="http://schemas.microsoft.com/office/powerpoint/2010/main" val="1840726560"/>
       </p:ext>
     </p:extLst>
   </p:cSld>
@@ -2355,22 +2357,23 @@
         </p:nvSpPr>
         <p:spPr>
           <a:xfrm>
-            <a:off x="1792288" y="3600450"/>
-            <a:ext cx="5486400" cy="425054"/>
+            <a:off x="1792288" y="4800600"/>
+            <a:ext cx="5486400" cy="566738"/>
           </a:xfrm>
         </p:spPr>
         <p:txBody>
           <a:bodyPr anchor="b"/>
           <a:lstStyle>
             <a:lvl1pPr algn="l">
-              <a:defRPr sz="1500" b="1"/>
+              <a:defRPr sz="2000" b="1"/>
             </a:lvl1pPr>
           </a:lstStyle>
           <a:p>
             <a:r>
-              <a:rPr lang="en-US"/>
+              <a:rPr lang="en-US" smtClean="0"/>
               <a:t>Click to edit Master title style</a:t>
             </a:r>
+            <a:endParaRPr lang="en-US"/>
           </a:p>
         </p:txBody>
       </p:sp>
@@ -2386,8 +2389,8 @@
         </p:nvSpPr>
         <p:spPr>
           <a:xfrm>
-            <a:off x="1792288" y="459581"/>
-            <a:ext cx="5486400" cy="3086100"/>
+            <a:off x="1792288" y="612775"/>
+            <a:ext cx="5486400" cy="4114800"/>
           </a:xfrm>
         </p:spPr>
         <p:txBody>
@@ -2395,39 +2398,39 @@
           <a:lstStyle>
             <a:lvl1pPr marL="0" indent="0">
               <a:buNone/>
+              <a:defRPr sz="3200"/>
+            </a:lvl1pPr>
+            <a:lvl2pPr marL="457200" indent="0">
+              <a:buNone/>
+              <a:defRPr sz="2800"/>
+            </a:lvl2pPr>
+            <a:lvl3pPr marL="914400" indent="0">
+              <a:buNone/>
               <a:defRPr sz="2400"/>
-            </a:lvl1pPr>
-            <a:lvl2pPr marL="342900" indent="0">
-              <a:buNone/>
-              <a:defRPr sz="2100"/>
-            </a:lvl2pPr>
-            <a:lvl3pPr marL="685800" indent="0">
-              <a:buNone/>
-              <a:defRPr sz="1800"/>
             </a:lvl3pPr>
-            <a:lvl4pPr marL="1028700" indent="0">
-              <a:buNone/>
-              <a:defRPr sz="1500"/>
+            <a:lvl4pPr marL="1371600" indent="0">
+              <a:buNone/>
+              <a:defRPr sz="2000"/>
             </a:lvl4pPr>
-            <a:lvl5pPr marL="1371600" indent="0">
-              <a:buNone/>
-              <a:defRPr sz="1500"/>
+            <a:lvl5pPr marL="1828800" indent="0">
+              <a:buNone/>
+              <a:defRPr sz="2000"/>
             </a:lvl5pPr>
-            <a:lvl6pPr marL="1714500" indent="0">
-              <a:buNone/>
-              <a:defRPr sz="1500"/>
+            <a:lvl6pPr marL="2286000" indent="0">
+              <a:buNone/>
+              <a:defRPr sz="2000"/>
             </a:lvl6pPr>
-            <a:lvl7pPr marL="2057400" indent="0">
-              <a:buNone/>
-              <a:defRPr sz="1500"/>
+            <a:lvl7pPr marL="2743200" indent="0">
+              <a:buNone/>
+              <a:defRPr sz="2000"/>
             </a:lvl7pPr>
-            <a:lvl8pPr marL="2400300" indent="0">
-              <a:buNone/>
-              <a:defRPr sz="1500"/>
+            <a:lvl8pPr marL="3200400" indent="0">
+              <a:buNone/>
+              <a:defRPr sz="2000"/>
             </a:lvl8pPr>
-            <a:lvl9pPr marL="2743200" indent="0">
-              <a:buNone/>
-              <a:defRPr sz="1500"/>
+            <a:lvl9pPr marL="3657600" indent="0">
+              <a:buNone/>
+              <a:defRPr sz="2000"/>
             </a:lvl9pPr>
           </a:lstStyle>
           <a:p>
@@ -2447,8 +2450,8 @@
         </p:nvSpPr>
         <p:spPr>
           <a:xfrm>
-            <a:off x="1792288" y="4025503"/>
-            <a:ext cx="5486400" cy="603647"/>
+            <a:off x="1792288" y="5367338"/>
+            <a:ext cx="5486400" cy="804862"/>
           </a:xfrm>
         </p:spPr>
         <p:txBody>
@@ -2456,45 +2459,45 @@
           <a:lstStyle>
             <a:lvl1pPr marL="0" indent="0">
               <a:buNone/>
-              <a:defRPr sz="1050"/>
+              <a:defRPr sz="1400"/>
             </a:lvl1pPr>
-            <a:lvl2pPr marL="342900" indent="0">
+            <a:lvl2pPr marL="457200" indent="0">
+              <a:buNone/>
+              <a:defRPr sz="1200"/>
+            </a:lvl2pPr>
+            <a:lvl3pPr marL="914400" indent="0">
+              <a:buNone/>
+              <a:defRPr sz="1000"/>
+            </a:lvl3pPr>
+            <a:lvl4pPr marL="1371600" indent="0">
               <a:buNone/>
               <a:defRPr sz="900"/>
-            </a:lvl2pPr>
-            <a:lvl3pPr marL="685800" indent="0">
-              <a:buNone/>
-              <a:defRPr sz="750"/>
-            </a:lvl3pPr>
-            <a:lvl4pPr marL="1028700" indent="0">
-              <a:buNone/>
-              <a:defRPr sz="675"/>
             </a:lvl4pPr>
-            <a:lvl5pPr marL="1371600" indent="0">
-              <a:buNone/>
-              <a:defRPr sz="675"/>
+            <a:lvl5pPr marL="1828800" indent="0">
+              <a:buNone/>
+              <a:defRPr sz="900"/>
             </a:lvl5pPr>
-            <a:lvl6pPr marL="1714500" indent="0">
-              <a:buNone/>
-              <a:defRPr sz="675"/>
+            <a:lvl6pPr marL="2286000" indent="0">
+              <a:buNone/>
+              <a:defRPr sz="900"/>
             </a:lvl6pPr>
-            <a:lvl7pPr marL="2057400" indent="0">
-              <a:buNone/>
-              <a:defRPr sz="675"/>
+            <a:lvl7pPr marL="2743200" indent="0">
+              <a:buNone/>
+              <a:defRPr sz="900"/>
             </a:lvl7pPr>
-            <a:lvl8pPr marL="2400300" indent="0">
-              <a:buNone/>
-              <a:defRPr sz="675"/>
+            <a:lvl8pPr marL="3200400" indent="0">
+              <a:buNone/>
+              <a:defRPr sz="900"/>
             </a:lvl8pPr>
-            <a:lvl9pPr marL="2743200" indent="0">
-              <a:buNone/>
-              <a:defRPr sz="675"/>
+            <a:lvl9pPr marL="3657600" indent="0">
+              <a:buNone/>
+              <a:defRPr sz="900"/>
             </a:lvl9pPr>
           </a:lstStyle>
           <a:p>
             <a:pPr lvl="0"/>
             <a:r>
-              <a:rPr lang="en-US"/>
+              <a:rPr lang="en-US" smtClean="0"/>
               <a:t>Click to edit Master text styles</a:t>
             </a:r>
           </a:p>
@@ -2515,9 +2518,9 @@
           <a:bodyPr/>
           <a:lstStyle/>
           <a:p>
-            <a:fld id="{241EB5C9-1307-BA42-ABA2-0BC069CD8E7F}" type="datetimeFigureOut">
-              <a:rPr lang="en-US" smtClean="0"/>
-              <a:t>1/2/22</a:t>
+            <a:fld id="{5BCAD085-E8A6-8845-BD4E-CB4CCA059FC4}" type="datetimeFigureOut">
+              <a:rPr lang="en-US" smtClean="0"/>
+              <a:t>1/27/13</a:t>
             </a:fld>
             <a:endParaRPr lang="en-US"/>
           </a:p>
@@ -2557,7 +2560,7 @@
           <a:bodyPr/>
           <a:lstStyle/>
           <a:p>
-            <a:fld id="{C5EF2332-01BF-834F-8236-50238282D533}" type="slidenum">
+            <a:fld id="{C1FF6DA9-008F-8B48-92A6-B652298478BF}" type="slidenum">
               <a:rPr lang="en-US" smtClean="0"/>
               <a:t>‹#›</a:t>
             </a:fld>
@@ -2568,7 +2571,7 @@
     </p:spTree>
     <p:extLst>
       <p:ext uri="{BB962C8B-B14F-4D97-AF65-F5344CB8AC3E}">
-        <p14:creationId xmlns:p14="http://schemas.microsoft.com/office/powerpoint/2010/main" val="3566899855"/>
+        <p14:creationId xmlns:p14="http://schemas.microsoft.com/office/powerpoint/2010/main" val="3889236939"/>
       </p:ext>
     </p:extLst>
   </p:cSld>
@@ -2579,7 +2582,7 @@
 </file>
 
 <file path=ppt/slideMasters/slideMaster1.xml><?xml version="1.0" encoding="utf-8"?>
-<p:sldMaster xmlns:a="http://schemas.openxmlformats.org/drawingml/2006/main" xmlns:p="http://schemas.openxmlformats.org/presentationml/2006/main" xmlns:r="http://schemas.openxmlformats.org/officeDocument/2006/relationships">
+<p:sldMaster xmlns:a="http://schemas.openxmlformats.org/drawingml/2006/main" xmlns:r="http://schemas.openxmlformats.org/officeDocument/2006/relationships" xmlns:p="http://schemas.openxmlformats.org/presentationml/2006/main">
   <p:cSld>
     <p:bg>
       <p:bgRef idx="1001">
@@ -2612,23 +2615,24 @@
         </p:nvSpPr>
         <p:spPr>
           <a:xfrm>
-            <a:off x="457200" y="205979"/>
-            <a:ext cx="8229600" cy="857250"/>
+            <a:off x="457200" y="274638"/>
+            <a:ext cx="8229600" cy="1143000"/>
           </a:xfrm>
           <a:prstGeom prst="rect">
             <a:avLst/>
           </a:prstGeom>
         </p:spPr>
         <p:txBody>
-          <a:bodyPr anchor="ctr" bIns="45720" lIns="91440" rIns="91440" rtlCol="0" tIns="45720" vert="horz">
+          <a:bodyPr vert="horz" lIns="91440" tIns="45720" rIns="91440" bIns="45720" rtlCol="0" anchor="ctr">
             <a:normAutofit/>
           </a:bodyPr>
           <a:lstStyle/>
           <a:p>
             <a:r>
-              <a:rPr lang="en-US"/>
+              <a:rPr lang="en-US" smtClean="0"/>
               <a:t>Click to edit Master title style</a:t>
             </a:r>
+            <a:endParaRPr lang="en-US"/>
           </a:p>
         </p:txBody>
       </p:sp>
@@ -2639,57 +2643,58 @@
             <a:spLocks noGrp="1"/>
           </p:cNvSpPr>
           <p:nvPr>
-            <p:ph idx="1" type="body"/>
+            <p:ph type="body" idx="1"/>
           </p:nvPr>
         </p:nvSpPr>
         <p:spPr>
           <a:xfrm>
-            <a:off x="457200" y="1200151"/>
-            <a:ext cx="8229600" cy="3394472"/>
+            <a:off x="457200" y="1600200"/>
+            <a:ext cx="8229600" cy="4525963"/>
           </a:xfrm>
           <a:prstGeom prst="rect">
             <a:avLst/>
           </a:prstGeom>
         </p:spPr>
         <p:txBody>
-          <a:bodyPr bIns="45720" lIns="91440" rIns="91440" rtlCol="0" tIns="45720" vert="horz">
+          <a:bodyPr vert="horz" lIns="91440" tIns="45720" rIns="91440" bIns="45720" rtlCol="0">
             <a:normAutofit/>
           </a:bodyPr>
           <a:lstStyle/>
           <a:p>
             <a:pPr lvl="0"/>
             <a:r>
-              <a:rPr lang="en-US"/>
+              <a:rPr lang="en-US" smtClean="0"/>
               <a:t>Click to edit Master text styles</a:t>
             </a:r>
           </a:p>
           <a:p>
             <a:pPr lvl="1"/>
             <a:r>
-              <a:rPr lang="en-US"/>
+              <a:rPr lang="en-US" smtClean="0"/>
               <a:t>Second level</a:t>
             </a:r>
           </a:p>
           <a:p>
             <a:pPr lvl="2"/>
             <a:r>
-              <a:rPr lang="en-US"/>
+              <a:rPr lang="en-US" smtClean="0"/>
               <a:t>Third level</a:t>
             </a:r>
           </a:p>
           <a:p>
             <a:pPr lvl="3"/>
             <a:r>
-              <a:rPr lang="en-US"/>
+              <a:rPr lang="en-US" smtClean="0"/>
               <a:t>Fourth level</a:t>
             </a:r>
           </a:p>
           <a:p>
             <a:pPr lvl="4"/>
             <a:r>
-              <a:rPr lang="en-US"/>
+              <a:rPr lang="en-US" smtClean="0"/>
               <a:t>Fifth level</a:t>
             </a:r>
+            <a:endParaRPr lang="en-US"/>
           </a:p>
         </p:txBody>
       </p:sp>
@@ -2700,23 +2705,23 @@
             <a:spLocks noGrp="1"/>
           </p:cNvSpPr>
           <p:nvPr>
-            <p:ph idx="2" sz="half" type="dt"/>
+            <p:ph type="dt" sz="half" idx="2"/>
           </p:nvPr>
         </p:nvSpPr>
         <p:spPr>
           <a:xfrm>
-            <a:off x="457200" y="4767263"/>
-            <a:ext cx="2133600" cy="273844"/>
+            <a:off x="457200" y="6356350"/>
+            <a:ext cx="2133600" cy="365125"/>
           </a:xfrm>
           <a:prstGeom prst="rect">
             <a:avLst/>
           </a:prstGeom>
         </p:spPr>
         <p:txBody>
-          <a:bodyPr anchor="ctr" bIns="45720" lIns="91440" rIns="91440" rtlCol="0" tIns="45720" vert="horz"/>
+          <a:bodyPr vert="horz" lIns="91440" tIns="45720" rIns="91440" bIns="45720" rtlCol="0" anchor="ctr"/>
           <a:lstStyle>
             <a:lvl1pPr algn="l">
-              <a:defRPr sz="900">
+              <a:defRPr sz="1200">
                 <a:solidFill>
                   <a:schemeClr val="tx1">
                     <a:tint val="75000"/>
@@ -2726,9 +2731,9 @@
             </a:lvl1pPr>
           </a:lstStyle>
           <a:p>
-            <a:fld id="{241EB5C9-1307-BA42-ABA2-0BC069CD8E7F}" type="datetimeFigureOut">
-              <a:rPr lang="en-US" smtClean="0"/>
-              <a:t>1/2/22</a:t>
+            <a:fld id="{5BCAD085-E8A6-8845-BD4E-CB4CCA059FC4}" type="datetimeFigureOut">
+              <a:rPr lang="en-US" smtClean="0"/>
+              <a:t>1/27/13</a:t>
             </a:fld>
             <a:endParaRPr lang="en-US"/>
           </a:p>
@@ -2741,23 +2746,23 @@
             <a:spLocks noGrp="1"/>
           </p:cNvSpPr>
           <p:nvPr>
-            <p:ph idx="3" sz="quarter" type="ftr"/>
+            <p:ph type="ftr" sz="quarter" idx="3"/>
           </p:nvPr>
         </p:nvSpPr>
         <p:spPr>
           <a:xfrm>
-            <a:off x="3124200" y="4767263"/>
-            <a:ext cx="2895600" cy="273844"/>
+            <a:off x="3124200" y="6356350"/>
+            <a:ext cx="2895600" cy="365125"/>
           </a:xfrm>
           <a:prstGeom prst="rect">
             <a:avLst/>
           </a:prstGeom>
         </p:spPr>
         <p:txBody>
-          <a:bodyPr anchor="ctr" bIns="45720" lIns="91440" rIns="91440" rtlCol="0" tIns="45720" vert="horz"/>
+          <a:bodyPr vert="horz" lIns="91440" tIns="45720" rIns="91440" bIns="45720" rtlCol="0" anchor="ctr"/>
           <a:lstStyle>
             <a:lvl1pPr algn="ctr">
-              <a:defRPr sz="900">
+              <a:defRPr sz="1200">
                 <a:solidFill>
                   <a:schemeClr val="tx1">
                     <a:tint val="75000"/>
@@ -2778,23 +2783,23 @@
             <a:spLocks noGrp="1"/>
           </p:cNvSpPr>
           <p:nvPr>
-            <p:ph idx="4" sz="quarter" type="sldNum"/>
+            <p:ph type="sldNum" sz="quarter" idx="4"/>
           </p:nvPr>
         </p:nvSpPr>
         <p:spPr>
           <a:xfrm>
-            <a:off x="6553200" y="4767263"/>
-            <a:ext cx="2133600" cy="273844"/>
+            <a:off x="6553200" y="6356350"/>
+            <a:ext cx="2133600" cy="365125"/>
           </a:xfrm>
           <a:prstGeom prst="rect">
             <a:avLst/>
           </a:prstGeom>
         </p:spPr>
         <p:txBody>
-          <a:bodyPr anchor="ctr" bIns="45720" lIns="91440" rIns="91440" rtlCol="0" tIns="45720" vert="horz"/>
+          <a:bodyPr vert="horz" lIns="91440" tIns="45720" rIns="91440" bIns="45720" rtlCol="0" anchor="ctr"/>
           <a:lstStyle>
             <a:lvl1pPr algn="r">
-              <a:defRPr sz="900">
+              <a:defRPr sz="1200">
                 <a:solidFill>
                   <a:schemeClr val="tx1">
                     <a:tint val="75000"/>
@@ -2804,7 +2809,7 @@
             </a:lvl1pPr>
           </a:lstStyle>
           <a:p>
-            <a:fld id="{C5EF2332-01BF-834F-8236-50238282D533}" type="slidenum">
+            <a:fld id="{C1FF6DA9-008F-8B48-92A6-B652298478BF}" type="slidenum">
               <a:rPr lang="en-US" smtClean="0"/>
               <a:t>‹#›</a:t>
             </a:fld>
@@ -2815,11 +2820,11 @@
     </p:spTree>
     <p:extLst>
       <p:ext uri="{BB962C8B-B14F-4D97-AF65-F5344CB8AC3E}">
-        <p14:creationId xmlns:p14="http://schemas.microsoft.com/office/powerpoint/2010/main" val="3676200875"/>
+        <p14:creationId xmlns:p14="http://schemas.microsoft.com/office/powerpoint/2010/main" val="2209977519"/>
       </p:ext>
     </p:extLst>
   </p:cSld>
-  <p:clrMap accent1="accent1" accent2="accent2" accent3="accent3" accent4="accent4" accent5="accent5" accent6="accent6" bg1="lt1" bg2="lt2" folHlink="folHlink" hlink="hlink" tx1="dk1" tx2="dk2"/>
+  <p:clrMap bg1="lt1" tx1="dk1" bg2="lt2" tx2="dk2" accent1="accent1" accent2="accent2" accent3="accent3" accent4="accent4" accent5="accent5" accent6="accent6" hlink="hlink" folHlink="folHlink"/>
   <p:sldLayoutIdLst>
     <p:sldLayoutId id="2147483649" r:id="rId1"/>
     <p:sldLayoutId id="2147483650" r:id="rId2"/>
@@ -2835,12 +2840,12 @@
   </p:sldLayoutIdLst>
   <p:txStyles>
     <p:titleStyle>
-      <a:lvl1pPr algn="ctr" defTabSz="342900" eaLnBrk="1" hangingPunct="1" latinLnBrk="0" rtl="0">
+      <a:lvl1pPr algn="ctr" defTabSz="457200" rtl="0" eaLnBrk="1" latinLnBrk="0" hangingPunct="1">
         <a:spcBef>
           <a:spcPct val="0"/>
         </a:spcBef>
         <a:buNone/>
-        <a:defRPr kern="1200" sz="3300">
+        <a:defRPr sz="4400" kern="1200">
           <a:solidFill>
             <a:schemeClr val="tx1"/>
           </a:solidFill>
@@ -2851,13 +2856,13 @@
       </a:lvl1pPr>
     </p:titleStyle>
     <p:bodyStyle>
-      <a:lvl1pPr algn="l" defTabSz="342900" eaLnBrk="1" hangingPunct="1" indent="-342900" latinLnBrk="0" marL="342900" rtl="0">
+      <a:lvl1pPr marL="342900" indent="-342900" algn="l" defTabSz="457200" rtl="0" eaLnBrk="1" latinLnBrk="0" hangingPunct="1">
         <a:spcBef>
           <a:spcPct val="20000"/>
         </a:spcBef>
         <a:buFont typeface="Arial"/>
         <a:buChar char="•"/>
-        <a:defRPr kern="1200" sz="2400">
+        <a:defRPr sz="3200" kern="1200">
           <a:solidFill>
             <a:schemeClr val="tx1"/>
           </a:solidFill>
@@ -2866,13 +2871,13 @@
           <a:cs typeface="+mn-cs"/>
         </a:defRPr>
       </a:lvl1pPr>
-      <a:lvl2pPr algn="l" defTabSz="342900" eaLnBrk="1" hangingPunct="1" indent="-342900" latinLnBrk="0" marL="685800" rtl="0">
+      <a:lvl2pPr marL="742950" indent="-285750" algn="l" defTabSz="457200" rtl="0" eaLnBrk="1" latinLnBrk="0" hangingPunct="1">
         <a:spcBef>
           <a:spcPct val="20000"/>
         </a:spcBef>
         <a:buFont typeface="Arial"/>
         <a:buChar char="–"/>
-        <a:defRPr kern="1200" sz="2100">
+        <a:defRPr sz="2800" kern="1200">
           <a:solidFill>
             <a:schemeClr val="tx1"/>
           </a:solidFill>
@@ -2881,13 +2886,13 @@
           <a:cs typeface="+mn-cs"/>
         </a:defRPr>
       </a:lvl2pPr>
-      <a:lvl3pPr algn="l" defTabSz="342900" eaLnBrk="1" hangingPunct="1" indent="-342900" latinLnBrk="0" marL="1028700" rtl="0">
+      <a:lvl3pPr marL="1143000" indent="-228600" algn="l" defTabSz="457200" rtl="0" eaLnBrk="1" latinLnBrk="0" hangingPunct="1">
         <a:spcBef>
           <a:spcPct val="20000"/>
         </a:spcBef>
         <a:buFont typeface="Arial"/>
         <a:buChar char="•"/>
-        <a:defRPr kern="1200" sz="1800">
+        <a:defRPr sz="2400" kern="1200">
           <a:solidFill>
             <a:schemeClr val="tx1"/>
           </a:solidFill>
@@ -2896,13 +2901,13 @@
           <a:cs typeface="+mn-cs"/>
         </a:defRPr>
       </a:lvl3pPr>
-      <a:lvl4pPr algn="l" defTabSz="342900" eaLnBrk="1" hangingPunct="1" indent="-342900" latinLnBrk="0" marL="1371600" rtl="0">
+      <a:lvl4pPr marL="1600200" indent="-228600" algn="l" defTabSz="457200" rtl="0" eaLnBrk="1" latinLnBrk="0" hangingPunct="1">
         <a:spcBef>
           <a:spcPct val="20000"/>
         </a:spcBef>
         <a:buFont typeface="Arial"/>
         <a:buChar char="–"/>
-        <a:defRPr kern="1200" sz="1500">
+        <a:defRPr sz="2000" kern="1200">
           <a:solidFill>
             <a:schemeClr val="tx1"/>
           </a:solidFill>
@@ -2911,13 +2916,13 @@
           <a:cs typeface="+mn-cs"/>
         </a:defRPr>
       </a:lvl4pPr>
-      <a:lvl5pPr algn="l" defTabSz="342900" eaLnBrk="1" hangingPunct="1" indent="-342900" latinLnBrk="0" marL="1714500" rtl="0">
+      <a:lvl5pPr marL="2057400" indent="-228600" algn="l" defTabSz="457200" rtl="0" eaLnBrk="1" latinLnBrk="0" hangingPunct="1">
         <a:spcBef>
           <a:spcPct val="20000"/>
         </a:spcBef>
         <a:buFont typeface="Arial"/>
         <a:buChar char="»"/>
-        <a:defRPr kern="1200" sz="1500">
+        <a:defRPr sz="2000" kern="1200">
           <a:solidFill>
             <a:schemeClr val="tx1"/>
           </a:solidFill>
@@ -2926,13 +2931,13 @@
           <a:cs typeface="+mn-cs"/>
         </a:defRPr>
       </a:lvl5pPr>
-      <a:lvl6pPr algn="l" defTabSz="342900" eaLnBrk="1" hangingPunct="1" indent="-342900" latinLnBrk="0" marL="2057400" rtl="0">
+      <a:lvl6pPr marL="2514600" indent="-228600" algn="l" defTabSz="457200" rtl="0" eaLnBrk="1" latinLnBrk="0" hangingPunct="1">
         <a:spcBef>
           <a:spcPct val="20000"/>
         </a:spcBef>
         <a:buFont typeface="Arial"/>
         <a:buChar char="•"/>
-        <a:defRPr kern="1200" sz="1500">
+        <a:defRPr sz="2000" kern="1200">
           <a:solidFill>
             <a:schemeClr val="tx1"/>
           </a:solidFill>
@@ -2941,13 +2946,13 @@
           <a:cs typeface="+mn-cs"/>
         </a:defRPr>
       </a:lvl6pPr>
-      <a:lvl7pPr algn="l" defTabSz="342900" eaLnBrk="1" hangingPunct="1" indent="-342900" latinLnBrk="0" marL="2400300" rtl="0">
+      <a:lvl7pPr marL="2971800" indent="-228600" algn="l" defTabSz="457200" rtl="0" eaLnBrk="1" latinLnBrk="0" hangingPunct="1">
         <a:spcBef>
           <a:spcPct val="20000"/>
         </a:spcBef>
         <a:buFont typeface="Arial"/>
         <a:buChar char="•"/>
-        <a:defRPr kern="1200" sz="1500">
+        <a:defRPr sz="2000" kern="1200">
           <a:solidFill>
             <a:schemeClr val="tx1"/>
           </a:solidFill>
@@ -2956,13 +2961,13 @@
           <a:cs typeface="+mn-cs"/>
         </a:defRPr>
       </a:lvl7pPr>
-      <a:lvl8pPr algn="l" defTabSz="342900" eaLnBrk="1" hangingPunct="1" indent="-342900" latinLnBrk="0" marL="2743200" rtl="0">
+      <a:lvl8pPr marL="3429000" indent="-228600" algn="l" defTabSz="457200" rtl="0" eaLnBrk="1" latinLnBrk="0" hangingPunct="1">
         <a:spcBef>
           <a:spcPct val="20000"/>
         </a:spcBef>
         <a:buFont typeface="Arial"/>
         <a:buChar char="•"/>
-        <a:defRPr kern="1200" sz="1500">
+        <a:defRPr sz="2000" kern="1200">
           <a:solidFill>
             <a:schemeClr val="tx1"/>
           </a:solidFill>
@@ -2971,13 +2976,13 @@
           <a:cs typeface="+mn-cs"/>
         </a:defRPr>
       </a:lvl8pPr>
-      <a:lvl9pPr algn="l" defTabSz="342900" eaLnBrk="1" hangingPunct="1" indent="-342900" latinLnBrk="0" marL="3086100" rtl="0">
+      <a:lvl9pPr marL="3886200" indent="-228600" algn="l" defTabSz="457200" rtl="0" eaLnBrk="1" latinLnBrk="0" hangingPunct="1">
         <a:spcBef>
           <a:spcPct val="20000"/>
         </a:spcBef>
         <a:buFont typeface="Arial"/>
         <a:buChar char="•"/>
-        <a:defRPr kern="1200" sz="1500">
+        <a:defRPr sz="2000" kern="1200">
           <a:solidFill>
             <a:schemeClr val="tx1"/>
           </a:solidFill>
@@ -2991,8 +2996,8 @@
       <a:defPPr>
         <a:defRPr lang="en-US"/>
       </a:defPPr>
-      <a:lvl1pPr algn="l" defTabSz="342900" eaLnBrk="1" hangingPunct="1" latinLnBrk="0" marL="0" rtl="0">
-        <a:defRPr kern="1200" sz="1350">
+      <a:lvl1pPr marL="0" algn="l" defTabSz="457200" rtl="0" eaLnBrk="1" latinLnBrk="0" hangingPunct="1">
+        <a:defRPr sz="1800" kern="1200">
           <a:solidFill>
             <a:schemeClr val="tx1"/>
           </a:solidFill>
@@ -3001,8 +3006,8 @@
           <a:cs typeface="+mn-cs"/>
         </a:defRPr>
       </a:lvl1pPr>
-      <a:lvl2pPr algn="l" defTabSz="342900" eaLnBrk="1" hangingPunct="1" latinLnBrk="0" marL="342900" rtl="0">
-        <a:defRPr kern="1200" sz="1350">
+      <a:lvl2pPr marL="457200" algn="l" defTabSz="457200" rtl="0" eaLnBrk="1" latinLnBrk="0" hangingPunct="1">
+        <a:defRPr sz="1800" kern="1200">
           <a:solidFill>
             <a:schemeClr val="tx1"/>
           </a:solidFill>
@@ -3011,8 +3016,8 @@
           <a:cs typeface="+mn-cs"/>
         </a:defRPr>
       </a:lvl2pPr>
-      <a:lvl3pPr algn="l" defTabSz="342900" eaLnBrk="1" hangingPunct="1" latinLnBrk="0" marL="685800" rtl="0">
-        <a:defRPr kern="1200" sz="1350">
+      <a:lvl3pPr marL="914400" algn="l" defTabSz="457200" rtl="0" eaLnBrk="1" latinLnBrk="0" hangingPunct="1">
+        <a:defRPr sz="1800" kern="1200">
           <a:solidFill>
             <a:schemeClr val="tx1"/>
           </a:solidFill>
@@ -3021,8 +3026,8 @@
           <a:cs typeface="+mn-cs"/>
         </a:defRPr>
       </a:lvl3pPr>
-      <a:lvl4pPr algn="l" defTabSz="342900" eaLnBrk="1" hangingPunct="1" latinLnBrk="0" marL="1028700" rtl="0">
-        <a:defRPr kern="1200" sz="1350">
+      <a:lvl4pPr marL="1371600" algn="l" defTabSz="457200" rtl="0" eaLnBrk="1" latinLnBrk="0" hangingPunct="1">
+        <a:defRPr sz="1800" kern="1200">
           <a:solidFill>
             <a:schemeClr val="tx1"/>
           </a:solidFill>
@@ -3031,8 +3036,8 @@
           <a:cs typeface="+mn-cs"/>
         </a:defRPr>
       </a:lvl4pPr>
-      <a:lvl5pPr algn="l" defTabSz="342900" eaLnBrk="1" hangingPunct="1" latinLnBrk="0" marL="1371600" rtl="0">
-        <a:defRPr kern="1200" sz="1350">
+      <a:lvl5pPr marL="1828800" algn="l" defTabSz="457200" rtl="0" eaLnBrk="1" latinLnBrk="0" hangingPunct="1">
+        <a:defRPr sz="1800" kern="1200">
           <a:solidFill>
             <a:schemeClr val="tx1"/>
           </a:solidFill>
@@ -3041,8 +3046,8 @@
           <a:cs typeface="+mn-cs"/>
         </a:defRPr>
       </a:lvl5pPr>
-      <a:lvl6pPr algn="l" defTabSz="342900" eaLnBrk="1" hangingPunct="1" latinLnBrk="0" marL="1714500" rtl="0">
-        <a:defRPr kern="1200" sz="1350">
+      <a:lvl6pPr marL="2286000" algn="l" defTabSz="457200" rtl="0" eaLnBrk="1" latinLnBrk="0" hangingPunct="1">
+        <a:defRPr sz="1800" kern="1200">
           <a:solidFill>
             <a:schemeClr val="tx1"/>
           </a:solidFill>
@@ -3051,8 +3056,8 @@
           <a:cs typeface="+mn-cs"/>
         </a:defRPr>
       </a:lvl6pPr>
-      <a:lvl7pPr algn="l" defTabSz="342900" eaLnBrk="1" hangingPunct="1" latinLnBrk="0" marL="2057400" rtl="0">
-        <a:defRPr kern="1200" sz="1350">
+      <a:lvl7pPr marL="2743200" algn="l" defTabSz="457200" rtl="0" eaLnBrk="1" latinLnBrk="0" hangingPunct="1">
+        <a:defRPr sz="1800" kern="1200">
           <a:solidFill>
             <a:schemeClr val="tx1"/>
           </a:solidFill>
@@ -3061,8 +3066,8 @@
           <a:cs typeface="+mn-cs"/>
         </a:defRPr>
       </a:lvl7pPr>
-      <a:lvl8pPr algn="l" defTabSz="342900" eaLnBrk="1" hangingPunct="1" latinLnBrk="0" marL="2400300" rtl="0">
-        <a:defRPr kern="1200" sz="1350">
+      <a:lvl8pPr marL="3200400" algn="l" defTabSz="457200" rtl="0" eaLnBrk="1" latinLnBrk="0" hangingPunct="1">
+        <a:defRPr sz="1800" kern="1200">
           <a:solidFill>
             <a:schemeClr val="tx1"/>
           </a:solidFill>
@@ -3071,8 +3076,8 @@
           <a:cs typeface="+mn-cs"/>
         </a:defRPr>
       </a:lvl8pPr>
-      <a:lvl9pPr algn="l" defTabSz="342900" eaLnBrk="1" hangingPunct="1" latinLnBrk="0" marL="2743200" rtl="0">
-        <a:defRPr kern="1200" sz="1350">
+      <a:lvl9pPr marL="3657600" algn="l" defTabSz="457200" rtl="0" eaLnBrk="1" latinLnBrk="0" hangingPunct="1">
+        <a:defRPr sz="1800" kern="1200">
           <a:solidFill>
             <a:schemeClr val="tx1"/>
           </a:solidFill>
@@ -3087,7 +3092,7 @@
 </file>
 
 <file path=ppt/slides/slide1.xml><?xml version="1.0" encoding="utf-8"?>
-<p:sld xmlns:a="http://schemas.openxmlformats.org/drawingml/2006/main" xmlns:r="http://schemas.openxmlformats.org/officeDocument/2006/relationships" xmlns:p="http://schemas.openxmlformats.org/presentationml/2006/main">
+<p:sld xmlns:a="http://schemas.openxmlformats.org/drawingml/2006/main" xmlns:p="http://schemas.openxmlformats.org/presentationml/2006/main" xmlns:r="http://schemas.openxmlformats.org/officeDocument/2006/relationships">
   <p:cSld>
     <p:spTree>
       <p:nvGrpSpPr>
@@ -3095,279 +3100,12 @@
         <p:cNvGrpSpPr/>
         <p:nvPr/>
       </p:nvGrpSpPr>
-      <p:grpSpPr>
-        <a:xfrm>
-          <a:off x="0" y="0"/>
-          <a:ext cx="0" cy="0"/>
-          <a:chOff x="0" y="0"/>
-          <a:chExt cx="0" cy="0"/>
-        </a:xfrm>
-      </p:grpSpPr>
-      <p:sp>
-        <p:nvSpPr>
-          <p:cNvPr id="2" name="Title 1"/>
-          <p:cNvSpPr>
-            <a:spLocks noGrp="1"/>
-          </p:cNvSpPr>
-          <p:nvPr>
-            <p:ph type="ctrTitle"/>
-          </p:nvPr>
-        </p:nvSpPr>
-        <p:spPr>
-          <a:xfrm>
-            <a:off x="685800" y="1597819"/>
-            <a:ext cx="7772400" cy="1102519"/>
-          </a:xfrm>
-        </p:spPr>
-        <p:txBody>
-          <a:bodyPr/>
-          <a:lstStyle/>
-          <a:p>
-            <a:pPr lvl="0" indent="0" marL="0">
-              <a:buNone/>
-            </a:pPr>
-            <a:r>
-              <a:rPr/>
-              <a:t>Scrubless</a:t>
-            </a:r>
-          </a:p>
-        </p:txBody>
-      </p:sp>
-      <p:sp>
-        <p:nvSpPr>
-          <p:cNvPr id="3" name="Subtitle 2"/>
-          <p:cNvSpPr>
-            <a:spLocks noGrp="1"/>
-          </p:cNvSpPr>
-          <p:nvPr>
-            <p:ph idx="1" type="subTitle"/>
-          </p:nvPr>
-        </p:nvSpPr>
-        <p:spPr>
-          <a:xfrm>
-            <a:off x="1371600" y="2914650"/>
-            <a:ext cx="6400800" cy="1314450"/>
-          </a:xfrm>
-        </p:spPr>
-        <p:txBody>
-          <a:bodyPr/>
-          <a:lstStyle/>
-          <a:p>
-            <a:pPr lvl="0" indent="0" marL="0">
-              <a:buNone/>
-            </a:pPr>
-            <a:r>
-              <a:rPr/>
-              <a:t>Stop scrubbing. Start searching.</a:t>
-            </a:r>
-            <a:br/>
-            <a:br/>
-            <a:r>
-              <a:rPr/>
-              <a:t>Chukwuebuka Ernest-Opara — getscrubless.com</a:t>
-            </a:r>
-          </a:p>
-        </p:txBody>
-      </p:sp>
-      <p:sp>
-        <p:nvSpPr>
-          <p:cNvPr id="4" name="Date Placeholder 3"/>
-          <p:cNvSpPr>
-            <a:spLocks noGrp="1"/>
-          </p:cNvSpPr>
-          <p:nvPr>
-            <p:ph idx="10" sz="half" type="dt"/>
-          </p:nvPr>
-        </p:nvSpPr>
-        <p:spPr/>
-        <p:txBody>
-          <a:bodyPr/>
-          <a:lstStyle/>
-          <a:p>
-            <a:pPr lvl="0" indent="0" marL="0">
-              <a:buNone/>
-            </a:pPr>
-            <a:r>
-              <a:rPr/>
-              <a:t>May 2026</a:t>
-            </a:r>
-          </a:p>
-        </p:txBody>
-      </p:sp>
-    </p:spTree>
-  </p:cSld>
-</p:sld>
-</file>
-
-<file path=ppt/slides/slide10.xml><?xml version="1.0" encoding="utf-8"?>
-<p:sld xmlns:a="http://schemas.openxmlformats.org/drawingml/2006/main" xmlns:r="http://schemas.openxmlformats.org/officeDocument/2006/relationships" xmlns:p="http://schemas.openxmlformats.org/presentationml/2006/main">
-  <p:cSld>
-    <p:spTree>
-      <p:nvGrpSpPr>
-        <p:cNvPr id="1" name=""/>
-        <p:cNvGrpSpPr/>
-        <p:nvPr/>
-      </p:nvGrpSpPr>
-      <p:grpSpPr>
-        <a:xfrm>
-          <a:off x="0" y="0"/>
-          <a:ext cx="0" cy="0"/>
-          <a:chOff x="0" y="0"/>
-          <a:chExt cx="0" cy="0"/>
-        </a:xfrm>
-      </p:grpSpPr>
-      <p:sp>
-        <p:nvSpPr>
-          <p:cNvPr id="2" name="Title 1"/>
-          <p:cNvSpPr>
-            <a:spLocks noGrp="1"/>
-          </p:cNvSpPr>
-          <p:nvPr>
-            <p:ph type="title"/>
-          </p:nvPr>
-        </p:nvSpPr>
-        <p:spPr/>
-        <p:txBody>
-          <a:bodyPr/>
-          <a:lstStyle/>
-          <a:p>
-            <a:pPr lvl="0" indent="0" marL="0">
-              <a:buNone/>
-            </a:pPr>
-            <a:r>
-              <a:rPr/>
-              <a:t>Business model</a:t>
-            </a:r>
-          </a:p>
-        </p:txBody>
-      </p:sp>
-      <p:sp>
-        <p:nvSpPr>
-          <p:cNvPr id="3" name="Content Placeholder 2"/>
-          <p:cNvSpPr>
-            <a:spLocks noGrp="1"/>
-          </p:cNvSpPr>
-          <p:nvPr>
-            <p:ph idx="1"/>
-          </p:nvPr>
-        </p:nvSpPr>
-        <p:spPr/>
-        <p:txBody>
-          <a:bodyPr/>
-          <a:lstStyle/>
-          <a:p>
-            <a:pPr lvl="0" indent="0" marL="0">
-              <a:buNone/>
-            </a:pPr>
-            <a:r>
-              <a:rPr/>
-              <a:t>Freemium SaaS, priced on what costs us money: </a:t>
-            </a:r>
-            <a:r>
-              <a:rPr b="1"/>
-              <a:t>indexed hours</a:t>
-            </a:r>
-            <a:r>
-              <a:rPr/>
-              <a:t>.</a:t>
-            </a:r>
-          </a:p>
-          <a:p>
-            <a:pPr lvl="0"/>
-            <a:r>
-              <a:rPr b="1"/>
-              <a:t>Free</a:t>
-            </a:r>
-            <a:r>
-              <a:rPr/>
-              <a:t> — a few minutes to feel the magic.</a:t>
-            </a:r>
-          </a:p>
-          <a:p>
-            <a:pPr lvl="0"/>
-            <a:r>
-              <a:rPr b="1"/>
-              <a:t>Pro</a:t>
-            </a:r>
-            <a:r>
-              <a:rPr/>
-              <a:t> — monthly plan by indexed hours, self-serve via Stripe.</a:t>
-            </a:r>
-          </a:p>
-          <a:p>
-            <a:pPr lvl="0"/>
-            <a:r>
-              <a:rPr b="1"/>
-              <a:t>Expansion</a:t>
-            </a:r>
-            <a:r>
-              <a:rPr/>
-              <a:t> — team seats, API access, on-prem / enterprise.</a:t>
-            </a:r>
-          </a:p>
-          <a:p>
-            <a:pPr lvl="0" indent="0" marL="0">
-              <a:buNone/>
-            </a:pPr>
-            <a:r>
-              <a:rPr/>
-              <a:t>Cheap to run: one process, model and vector DB in-memory, fits on a single small instance — gross margin is on our side.</a:t>
-            </a:r>
-          </a:p>
-        </p:txBody>
-      </p:sp>
-    </p:spTree>
-  </p:cSld>
-</p:sld>
-</file>
-
-<file path=ppt/slides/slide11.xml><?xml version="1.0" encoding="utf-8"?>
-<p:sld xmlns:a="http://schemas.openxmlformats.org/drawingml/2006/main" xmlns:r="http://schemas.openxmlformats.org/officeDocument/2006/relationships" xmlns:p="http://schemas.openxmlformats.org/presentationml/2006/main">
-  <p:cSld>
-    <p:spTree>
-      <p:nvGrpSpPr>
-        <p:cNvPr id="1" name=""/>
-        <p:cNvGrpSpPr/>
-        <p:nvPr/>
-      </p:nvGrpSpPr>
-      <p:grpSpPr>
-        <a:xfrm>
-          <a:off x="0" y="0"/>
-          <a:ext cx="0" cy="0"/>
-          <a:chOff x="0" y="0"/>
-          <a:chExt cx="0" cy="0"/>
-        </a:xfrm>
-      </p:grpSpPr>
-      <p:sp>
-        <p:nvSpPr>
-          <p:cNvPr id="2" name="Title 1"/>
-          <p:cNvSpPr>
-            <a:spLocks noGrp="1"/>
-          </p:cNvSpPr>
-          <p:nvPr>
-            <p:ph type="title"/>
-          </p:nvPr>
-        </p:nvSpPr>
-        <p:spPr/>
-        <p:txBody>
-          <a:bodyPr/>
-          <a:lstStyle/>
-          <a:p>
-            <a:pPr lvl="0" indent="0" marL="0">
-              <a:buNone/>
-            </a:pPr>
-            <a:r>
-              <a:rPr/>
-              <a:t>Competition</a:t>
-            </a:r>
-          </a:p>
-        </p:txBody>
-      </p:sp>
+      <p:grpSpPr/>
       <p:pic>
         <p:nvPicPr>
-          <p:cNvPr descr="assets/competition.png" id="0" name="Picture 1"/>
+          <p:cNvPr id="2" name="Picture 1" descr="slide-01.png"/>
           <p:cNvPicPr>
-            <a:picLocks noGrp="1" noChangeAspect="1"/>
+            <a:picLocks noChangeAspect="1"/>
           </p:cNvPicPr>
           <p:nvPr/>
         </p:nvPicPr>
@@ -3377,111 +3115,26 @@
             <a:fillRect/>
           </a:stretch>
         </p:blipFill>
-        <p:spPr bwMode="auto">
+        <p:spPr>
           <a:xfrm>
-            <a:off x="901700" y="1193800"/>
-            <a:ext cx="3136900" cy="3390900"/>
+            <a:off x="0" y="0"/>
+            <a:ext cx="12191695" cy="6858000"/>
           </a:xfrm>
           <a:prstGeom prst="rect">
             <a:avLst/>
           </a:prstGeom>
-          <a:noFill/>
-          <a:ln w="9525">
-            <a:noFill/>
-            <a:headEnd/>
-            <a:tailEnd/>
-          </a:ln>
         </p:spPr>
       </p:pic>
-      <p:sp>
-        <p:nvSpPr>
-          <p:cNvPr id="4" name="Content Placeholder 3"/>
-          <p:cNvSpPr>
-            <a:spLocks noGrp="1"/>
-          </p:cNvSpPr>
-          <p:nvPr>
-            <p:ph idx="2" sz="half"/>
-          </p:nvPr>
-        </p:nvSpPr>
-        <p:spPr/>
-        <p:txBody>
-          <a:bodyPr/>
-          <a:lstStyle/>
-          <a:p>
-            <a:pPr lvl="0" indent="0" marL="0">
-              <a:buNone/>
-            </a:pPr>
-            <a:r>
-              <a:rPr/>
-              <a:t>Everyone else finds </a:t>
-            </a:r>
-            <a:r>
-              <a:rPr b="1"/>
-              <a:t>words</a:t>
-            </a:r>
-            <a:r>
-              <a:rPr/>
-              <a:t> or needs </a:t>
-            </a:r>
-            <a:r>
-              <a:rPr b="1"/>
-              <a:t>manual tags</a:t>
-            </a:r>
-            <a:r>
-              <a:rPr/>
-              <a:t>.</a:t>
-            </a:r>
-          </a:p>
-          <a:p>
-            <a:pPr lvl="0" indent="0" marL="0">
-              <a:buNone/>
-            </a:pPr>
-            <a:r>
-              <a:rPr/>
-              <a:t>Scrubless searches what’s </a:t>
-            </a:r>
-            <a:r>
-              <a:rPr b="1"/>
-              <a:t>shown</a:t>
-            </a:r>
-            <a:r>
-              <a:rPr/>
-              <a:t> </a:t>
-            </a:r>
-            <a:r>
-              <a:rPr i="1"/>
-              <a:t>and</a:t>
-            </a:r>
-            <a:r>
-              <a:rPr/>
-              <a:t> </a:t>
-            </a:r>
-            <a:r>
-              <a:rPr b="1"/>
-              <a:t>said</a:t>
-            </a:r>
-            <a:r>
-              <a:rPr/>
-              <a:t> — semantic, instant, on </a:t>
-            </a:r>
-            <a:r>
-              <a:rPr i="1"/>
-              <a:t>your own</a:t>
-            </a:r>
-            <a:r>
-              <a:rPr/>
-              <a:t> files. Top-right, and alone there.</a:t>
-            </a:r>
-          </a:p>
-        </p:txBody>
-      </p:sp>
     </p:spTree>
   </p:cSld>
+  <p:clrMapOvr>
+    <a:masterClrMapping/>
+  </p:clrMapOvr>
 </p:sld>
 </file>
 
-<file path=ppt/slides/slide12.xml><?xml version="1.0" encoding="utf-8"?>
-<p:sld xmlns:a="http://schemas.openxmlformats.org/drawingml/2006/main" xmlns:r="http://schemas.openxmlformats.org/officeDocument/2006/relationships" xmlns:p="http://schemas.openxmlformats.org/presentationml/2006/main">
+<file path=ppt/slides/slide10.xml><?xml version="1.0" encoding="utf-8"?>
+<p:sld xmlns:a="http://schemas.openxmlformats.org/drawingml/2006/main" xmlns:p="http://schemas.openxmlformats.org/presentationml/2006/main" xmlns:r="http://schemas.openxmlformats.org/officeDocument/2006/relationships">
   <p:cSld>
     <p:spTree>
       <p:nvGrpSpPr>
@@ -3489,712 +3142,12 @@
         <p:cNvGrpSpPr/>
         <p:nvPr/>
       </p:nvGrpSpPr>
-      <p:grpSpPr>
-        <a:xfrm>
-          <a:off x="0" y="0"/>
-          <a:ext cx="0" cy="0"/>
-          <a:chOff x="0" y="0"/>
-          <a:chExt cx="0" cy="0"/>
-        </a:xfrm>
-      </p:grpSpPr>
-      <p:sp>
-        <p:nvSpPr>
-          <p:cNvPr id="2" name="Title 1"/>
-          <p:cNvSpPr>
-            <a:spLocks noGrp="1"/>
-          </p:cNvSpPr>
-          <p:nvPr>
-            <p:ph type="title"/>
-          </p:nvPr>
-        </p:nvSpPr>
-        <p:spPr/>
-        <p:txBody>
-          <a:bodyPr/>
-          <a:lstStyle/>
-          <a:p>
-            <a:pPr lvl="0" indent="0" marL="0">
-              <a:buNone/>
-            </a:pPr>
-            <a:r>
-              <a:rPr/>
-              <a:t>Why we win</a:t>
-            </a:r>
-          </a:p>
-        </p:txBody>
-      </p:sp>
-      <p:sp>
-        <p:nvSpPr>
-          <p:cNvPr id="3" name="Content Placeholder 2"/>
-          <p:cNvSpPr>
-            <a:spLocks noGrp="1"/>
-          </p:cNvSpPr>
-          <p:nvPr>
-            <p:ph idx="1"/>
-          </p:nvPr>
-        </p:nvSpPr>
-        <p:spPr/>
-        <p:txBody>
-          <a:bodyPr/>
-          <a:lstStyle/>
-          <a:p>
-            <a:pPr lvl="0"/>
-            <a:r>
-              <a:rPr b="1"/>
-              <a:t>Multimodal, not transcript-only</a:t>
-            </a:r>
-            <a:r>
-              <a:rPr/>
-              <a:t> — we search the pixels </a:t>
-            </a:r>
-            <a:r>
-              <a:rPr i="1"/>
-              <a:t>and</a:t>
-            </a:r>
-            <a:r>
-              <a:rPr/>
-              <a:t> the audio; competitors are blind to anything unspoken.</a:t>
-            </a:r>
-          </a:p>
-          <a:p>
-            <a:pPr lvl="0"/>
-            <a:r>
-              <a:rPr b="1"/>
-              <a:t>Live and billed today</a:t>
-            </a:r>
-            <a:r>
-              <a:rPr/>
-              <a:t> — a shipped product, while most “AI video search” is still a waitlist.</a:t>
-            </a:r>
-          </a:p>
-          <a:p>
-            <a:pPr lvl="0"/>
-            <a:r>
-              <a:rPr b="1"/>
-              <a:t>Built on real embedding infra</a:t>
-            </a:r>
-            <a:r>
-              <a:rPr/>
-              <a:t> — the founder ships ML/embedding systems in production; the hard part is home turf.</a:t>
-            </a:r>
-          </a:p>
-          <a:p>
-            <a:pPr lvl="0"/>
-            <a:r>
-              <a:rPr b="1"/>
-              <a:t>Index once, do everything</a:t>
-            </a:r>
-            <a:r>
-              <a:rPr/>
-              <a:t> — search, ask, chapters, reels off one index → widening surface area and switching cost.</a:t>
-            </a:r>
-          </a:p>
-          <a:p>
-            <a:pPr lvl="0" indent="0" marL="0">
-              <a:buNone/>
-            </a:pPr>
-            <a:r>
-              <a:rPr b="1"/>
-              <a:t>The capability is commoditizing — the product, polish, and data flywheel are not.</a:t>
-            </a:r>
-          </a:p>
-        </p:txBody>
-      </p:sp>
-    </p:spTree>
-  </p:cSld>
-</p:sld>
-</file>
-
-<file path=ppt/slides/slide13.xml><?xml version="1.0" encoding="utf-8"?>
-<p:sld xmlns:a="http://schemas.openxmlformats.org/drawingml/2006/main" xmlns:r="http://schemas.openxmlformats.org/officeDocument/2006/relationships" xmlns:p="http://schemas.openxmlformats.org/presentationml/2006/main">
-  <p:cSld>
-    <p:spTree>
-      <p:nvGrpSpPr>
-        <p:cNvPr id="1" name=""/>
-        <p:cNvGrpSpPr/>
-        <p:nvPr/>
-      </p:nvGrpSpPr>
-      <p:grpSpPr>
-        <a:xfrm>
-          <a:off x="0" y="0"/>
-          <a:ext cx="0" cy="0"/>
-          <a:chOff x="0" y="0"/>
-          <a:chExt cx="0" cy="0"/>
-        </a:xfrm>
-      </p:grpSpPr>
-      <p:sp>
-        <p:nvSpPr>
-          <p:cNvPr id="2" name="Title 1"/>
-          <p:cNvSpPr>
-            <a:spLocks noGrp="1"/>
-          </p:cNvSpPr>
-          <p:nvPr>
-            <p:ph type="title"/>
-          </p:nvPr>
-        </p:nvSpPr>
-        <p:spPr/>
-        <p:txBody>
-          <a:bodyPr/>
-          <a:lstStyle/>
-          <a:p>
-            <a:pPr lvl="0" indent="0" marL="0">
-              <a:buNone/>
-            </a:pPr>
-            <a:r>
-              <a:rPr/>
-              <a:t>Team</a:t>
-            </a:r>
-          </a:p>
-        </p:txBody>
-      </p:sp>
-      <p:sp>
-        <p:nvSpPr>
-          <p:cNvPr id="3" name="Content Placeholder 2"/>
-          <p:cNvSpPr>
-            <a:spLocks noGrp="1"/>
-          </p:cNvSpPr>
-          <p:nvPr>
-            <p:ph idx="1"/>
-          </p:nvPr>
-        </p:nvSpPr>
-        <p:spPr/>
-        <p:txBody>
-          <a:bodyPr/>
-          <a:lstStyle/>
-          <a:p>
-            <a:pPr lvl="0" indent="0" marL="0">
-              <a:buNone/>
-            </a:pPr>
-            <a:r>
-              <a:rPr b="1"/>
-              <a:t>Chukwuebuka Ernest-Opara</a:t>
-            </a:r>
-            <a:r>
-              <a:rPr/>
-              <a:t> — founder &amp; sole engineer · Oakland.</a:t>
-            </a:r>
-          </a:p>
-          <a:p>
-            <a:pPr lvl="0"/>
-            <a:r>
-              <a:rPr b="1"/>
-              <a:t>ML &amp; Platform Engineer at GEICO</a:t>
-            </a:r>
-            <a:r>
-              <a:rPr/>
-              <a:t> — ships </a:t>
-            </a:r>
-            <a:r>
-              <a:rPr b="1"/>
-              <a:t>embedding infrastructure</a:t>
-            </a:r>
-            <a:r>
-              <a:rPr/>
-              <a:t> and ML deployment pipelines in production (Go · Python · Azure ML · Kubernetes).</a:t>
-            </a:r>
-          </a:p>
-          <a:p>
-            <a:pPr lvl="0"/>
-            <a:r>
-              <a:rPr b="1"/>
-              <a:t>Videographer for several years</a:t>
-            </a:r>
-            <a:r>
-              <a:rPr/>
-              <a:t> before tech — has lived the scrubbing problem first-hand.</a:t>
-            </a:r>
-          </a:p>
-          <a:p>
-            <a:pPr lvl="0"/>
-            <a:r>
-              <a:rPr b="1"/>
-              <a:t>MS &amp; BS in Computer Science</a:t>
-            </a:r>
-            <a:r>
-              <a:rPr/>
-              <a:t> (Houston-Victoria; Babcock).</a:t>
-            </a:r>
-          </a:p>
-          <a:p>
-            <a:pPr lvl="0"/>
-            <a:r>
-              <a:rPr/>
-              <a:t>Built </a:t>
-            </a:r>
-            <a:r>
-              <a:rPr b="1"/>
-              <a:t>all of Scrubless solo</a:t>
-            </a:r>
-            <a:r>
-              <a:rPr/>
-              <a:t> — V1–V3, auth, and Stripe billing.</a:t>
-            </a:r>
-          </a:p>
-          <a:p>
-            <a:pPr lvl="0" indent="0" marL="0">
-              <a:buNone/>
-            </a:pPr>
-            <a:r>
-              <a:rPr b="1"/>
-              <a:t>In talks with two co-founders</a:t>
-            </a:r>
-            <a:r>
-              <a:rPr/>
-              <a:t> with media experience to lead content and go-to-market.</a:t>
-            </a:r>
-          </a:p>
-          <a:p>
-            <a:pPr lvl="0" indent="0" marL="0">
-              <a:buNone/>
-            </a:pPr>
-            <a:r>
-              <a:rPr/>
-              <a:t>Built the embedding engine </a:t>
-            </a:r>
-            <a:r>
-              <a:rPr i="1"/>
-              <a:t>and</a:t>
-            </a:r>
-            <a:r>
-              <a:rPr/>
-              <a:t> lived the problem it solves — rare founder-market fit for video.</a:t>
-            </a:r>
-          </a:p>
-        </p:txBody>
-      </p:sp>
-    </p:spTree>
-  </p:cSld>
-</p:sld>
-</file>
-
-<file path=ppt/slides/slide14.xml><?xml version="1.0" encoding="utf-8"?>
-<p:sld xmlns:a="http://schemas.openxmlformats.org/drawingml/2006/main" xmlns:r="http://schemas.openxmlformats.org/officeDocument/2006/relationships" xmlns:p="http://schemas.openxmlformats.org/presentationml/2006/main">
-  <p:cSld>
-    <p:spTree>
-      <p:nvGrpSpPr>
-        <p:cNvPr id="1" name=""/>
-        <p:cNvGrpSpPr/>
-        <p:nvPr/>
-      </p:nvGrpSpPr>
-      <p:grpSpPr>
-        <a:xfrm>
-          <a:off x="0" y="0"/>
-          <a:ext cx="0" cy="0"/>
-          <a:chOff x="0" y="0"/>
-          <a:chExt cx="0" cy="0"/>
-        </a:xfrm>
-      </p:grpSpPr>
-      <p:sp>
-        <p:nvSpPr>
-          <p:cNvPr id="2" name="Title 1"/>
-          <p:cNvSpPr>
-            <a:spLocks noGrp="1"/>
-          </p:cNvSpPr>
-          <p:nvPr>
-            <p:ph type="title"/>
-          </p:nvPr>
-        </p:nvSpPr>
-        <p:spPr/>
-        <p:txBody>
-          <a:bodyPr/>
-          <a:lstStyle/>
-          <a:p>
-            <a:pPr lvl="0" indent="0" marL="0">
-              <a:buNone/>
-            </a:pPr>
-            <a:r>
-              <a:rPr/>
-              <a:t>Vision</a:t>
-            </a:r>
-          </a:p>
-        </p:txBody>
-      </p:sp>
-      <p:sp>
-        <p:nvSpPr>
-          <p:cNvPr id="3" name="Content Placeholder 2"/>
-          <p:cNvSpPr>
-            <a:spLocks noGrp="1"/>
-          </p:cNvSpPr>
-          <p:nvPr>
-            <p:ph idx="1"/>
-          </p:nvPr>
-        </p:nvSpPr>
-        <p:spPr/>
-        <p:txBody>
-          <a:bodyPr/>
-          <a:lstStyle/>
-          <a:p>
-            <a:pPr lvl="0" indent="0" marL="0">
-              <a:buNone/>
-            </a:pPr>
-            <a:r>
-              <a:rPr b="1"/>
-              <a:t>The index layer for the world’s video.</a:t>
-            </a:r>
-            <a:r>
-              <a:rPr/>
-              <a:t> Every clip, meeting, lecture, and archive — instantly searchable, anywhere it lives.</a:t>
-            </a:r>
-          </a:p>
-          <a:p>
-            <a:pPr lvl="0" indent="0" marL="0">
-              <a:buNone/>
-            </a:pPr>
-            <a:r>
-              <a:rPr/>
-              <a:t>Search was the gateway to the web. Scrubless is that gateway for video.</a:t>
-            </a:r>
-          </a:p>
-          <a:p>
-            <a:pPr lvl="0" indent="0" marL="0">
-              <a:buNone/>
-            </a:pPr>
-            <a:r>
-              <a:rPr b="1"/>
-              <a:t>Stop scrubbing. Start searching.</a:t>
-            </a:r>
-          </a:p>
-          <a:p>
-            <a:pPr lvl="0" indent="0" marL="0">
-              <a:buNone/>
-            </a:pPr>
-            <a:r>
-              <a:rPr/>
-              <a:t>getscrubless.com · e@getscrubless.com</a:t>
-            </a:r>
-          </a:p>
-        </p:txBody>
-      </p:sp>
-    </p:spTree>
-  </p:cSld>
-</p:sld>
-</file>
-
-<file path=ppt/slides/slide2.xml><?xml version="1.0" encoding="utf-8"?>
-<p:sld xmlns:a="http://schemas.openxmlformats.org/drawingml/2006/main" xmlns:r="http://schemas.openxmlformats.org/officeDocument/2006/relationships" xmlns:p="http://schemas.openxmlformats.org/presentationml/2006/main">
-  <p:cSld>
-    <p:spTree>
-      <p:nvGrpSpPr>
-        <p:cNvPr id="1" name=""/>
-        <p:cNvGrpSpPr/>
-        <p:nvPr/>
-      </p:nvGrpSpPr>
-      <p:grpSpPr>
-        <a:xfrm>
-          <a:off x="0" y="0"/>
-          <a:ext cx="0" cy="0"/>
-          <a:chOff x="0" y="0"/>
-          <a:chExt cx="0" cy="0"/>
-        </a:xfrm>
-      </p:grpSpPr>
-      <p:sp>
-        <p:nvSpPr>
-          <p:cNvPr id="2" name="Title 1"/>
-          <p:cNvSpPr>
-            <a:spLocks noGrp="1"/>
-          </p:cNvSpPr>
-          <p:nvPr>
-            <p:ph type="title"/>
-          </p:nvPr>
-        </p:nvSpPr>
-        <p:spPr/>
-        <p:txBody>
-          <a:bodyPr/>
-          <a:lstStyle/>
-          <a:p>
-            <a:pPr lvl="0" indent="0" marL="0">
-              <a:buNone/>
-            </a:pPr>
-            <a:r>
-              <a:rPr/>
-              <a:t>The problem</a:t>
-            </a:r>
-          </a:p>
-        </p:txBody>
-      </p:sp>
-      <p:sp>
-        <p:nvSpPr>
-          <p:cNvPr id="3" name="Content Placeholder 2"/>
-          <p:cNvSpPr>
-            <a:spLocks noGrp="1"/>
-          </p:cNvSpPr>
-          <p:nvPr>
-            <p:ph idx="1"/>
-          </p:nvPr>
-        </p:nvSpPr>
-        <p:spPr/>
-        <p:txBody>
-          <a:bodyPr/>
-          <a:lstStyle/>
-          <a:p>
-            <a:pPr lvl="0" indent="0" marL="0">
-              <a:buNone/>
-            </a:pPr>
-            <a:r>
-              <a:rPr b="1"/>
-              <a:t>Video is the one medium you still can’t search.</a:t>
-            </a:r>
-          </a:p>
-          <a:p>
-            <a:pPr lvl="0"/>
-            <a:r>
-              <a:rPr/>
-              <a:t>500+ hours are uploaded to YouTube </a:t>
-            </a:r>
-            <a:r>
-              <a:rPr i="1"/>
-              <a:t>every minute</a:t>
-            </a:r>
-            <a:r>
-              <a:rPr/>
-              <a:t> — and that’s one platform.</a:t>
-            </a:r>
-          </a:p>
-          <a:p>
-            <a:pPr lvl="0"/>
-            <a:r>
-              <a:rPr/>
-              <a:t>Inside any single video, finding a moment means </a:t>
-            </a:r>
-            <a:r>
-              <a:rPr b="1"/>
-              <a:t>scrubbing</a:t>
-            </a:r>
-            <a:r>
-              <a:rPr/>
-              <a:t>: linear, manual, slow.</a:t>
-            </a:r>
-          </a:p>
-          <a:p>
-            <a:pPr lvl="0"/>
-            <a:r>
-              <a:rPr>
-                <a:latin typeface="Courier"/>
-              </a:rPr>
-              <a:t>Ctrl+F</a:t>
-            </a:r>
-            <a:r>
-              <a:rPr/>
-              <a:t> solved this for text 40 years ago. There’s still none for video.</a:t>
-            </a:r>
-          </a:p>
-          <a:p>
-            <a:pPr lvl="0" indent="0" marL="0">
-              <a:buNone/>
-            </a:pPr>
-            <a:r>
-              <a:rPr b="1"/>
-              <a:t>Editors lose up to a third of post-production</a:t>
-            </a:r>
-          </a:p>
-          <a:p>
-            <a:pPr lvl="0" indent="0" marL="0">
-              <a:buNone/>
-            </a:pPr>
-            <a:r>
-              <a:rPr/>
-              <a:t>just </a:t>
-            </a:r>
-            <a:r>
-              <a:rPr i="1"/>
-              <a:t>finding</a:t>
-            </a:r>
-            <a:r>
-              <a:rPr/>
-              <a:t> the right footage — before a single cut.</a:t>
-            </a:r>
-          </a:p>
-        </p:txBody>
-      </p:sp>
-    </p:spTree>
-  </p:cSld>
-</p:sld>
-</file>
-
-<file path=ppt/slides/slide3.xml><?xml version="1.0" encoding="utf-8"?>
-<p:sld xmlns:a="http://schemas.openxmlformats.org/drawingml/2006/main" xmlns:r="http://schemas.openxmlformats.org/officeDocument/2006/relationships" xmlns:p="http://schemas.openxmlformats.org/presentationml/2006/main">
-  <p:cSld>
-    <p:spTree>
-      <p:nvGrpSpPr>
-        <p:cNvPr id="1" name=""/>
-        <p:cNvGrpSpPr/>
-        <p:nvPr/>
-      </p:nvGrpSpPr>
-      <p:grpSpPr>
-        <a:xfrm>
-          <a:off x="0" y="0"/>
-          <a:ext cx="0" cy="0"/>
-          <a:chOff x="0" y="0"/>
-          <a:chExt cx="0" cy="0"/>
-        </a:xfrm>
-      </p:grpSpPr>
-      <p:sp>
-        <p:nvSpPr>
-          <p:cNvPr id="2" name="Title 1"/>
-          <p:cNvSpPr>
-            <a:spLocks noGrp="1"/>
-          </p:cNvSpPr>
-          <p:nvPr>
-            <p:ph type="title"/>
-          </p:nvPr>
-        </p:nvSpPr>
-        <p:spPr/>
-        <p:txBody>
-          <a:bodyPr/>
-          <a:lstStyle/>
-          <a:p>
-            <a:pPr lvl="0" indent="0" marL="0">
-              <a:buNone/>
-            </a:pPr>
-            <a:r>
-              <a:rPr/>
-              <a:t>The solution</a:t>
-            </a:r>
-          </a:p>
-        </p:txBody>
-      </p:sp>
-      <p:sp>
-        <p:nvSpPr>
-          <p:cNvPr id="3" name="Content Placeholder 2"/>
-          <p:cNvSpPr>
-            <a:spLocks noGrp="1"/>
-          </p:cNvSpPr>
-          <p:nvPr>
-            <p:ph idx="1"/>
-          </p:nvPr>
-        </p:nvSpPr>
-        <p:spPr/>
-        <p:txBody>
-          <a:bodyPr/>
-          <a:lstStyle/>
-          <a:p>
-            <a:pPr lvl="0" indent="0" marL="0">
-              <a:buNone/>
-            </a:pPr>
-            <a:r>
-              <a:rPr b="1"/>
-              <a:t>Scrubless is </a:t>
-            </a:r>
-            <a:r>
-              <a:rPr b="1">
-                <a:latin typeface="Courier"/>
-              </a:rPr>
-              <a:t>Ctrl+F</a:t>
-            </a:r>
-            <a:r>
-              <a:rPr b="1"/>
-              <a:t> for video.</a:t>
-            </a:r>
-          </a:p>
-          <a:p>
-            <a:pPr lvl="0"/>
-            <a:r>
-              <a:rPr/>
-              <a:t>Upload a video — or point Scrubless at a whole folder of them.</a:t>
-            </a:r>
-          </a:p>
-          <a:p>
-            <a:pPr lvl="0"/>
-            <a:r>
-              <a:rPr/>
-              <a:t>Search in plain English: </a:t>
-            </a:r>
-            <a:r>
-              <a:rPr i="1"/>
-              <a:t>“the part where someone is laughing.”</a:t>
-            </a:r>
-          </a:p>
-          <a:p>
-            <a:pPr lvl="0"/>
-            <a:r>
-              <a:rPr/>
-              <a:t>Click a result and the player jumps to that </a:t>
-            </a:r>
-            <a:r>
-              <a:rPr b="1"/>
-              <a:t>exact second</a:t>
-            </a:r>
-            <a:r>
-              <a:rPr/>
-              <a:t>.</a:t>
-            </a:r>
-          </a:p>
-          <a:p>
-            <a:pPr lvl="0"/>
-            <a:r>
-              <a:rPr/>
-              <a:t>It searches what’s </a:t>
-            </a:r>
-            <a:r>
-              <a:rPr b="1"/>
-              <a:t>shown</a:t>
-            </a:r>
-            <a:r>
-              <a:rPr/>
-              <a:t> and what’s </a:t>
-            </a:r>
-            <a:r>
-              <a:rPr b="1"/>
-              <a:t>said</a:t>
-            </a:r>
-            <a:r>
-              <a:rPr/>
-              <a:t> — not just captions.</a:t>
-            </a:r>
-          </a:p>
-        </p:txBody>
-      </p:sp>
-    </p:spTree>
-  </p:cSld>
-</p:sld>
-</file>
-
-<file path=ppt/slides/slide4.xml><?xml version="1.0" encoding="utf-8"?>
-<p:sld xmlns:a="http://schemas.openxmlformats.org/drawingml/2006/main" xmlns:r="http://schemas.openxmlformats.org/officeDocument/2006/relationships" xmlns:p="http://schemas.openxmlformats.org/presentationml/2006/main">
-  <p:cSld>
-    <p:spTree>
-      <p:nvGrpSpPr>
-        <p:cNvPr id="1" name=""/>
-        <p:cNvGrpSpPr/>
-        <p:nvPr/>
-      </p:nvGrpSpPr>
-      <p:grpSpPr>
-        <a:xfrm>
-          <a:off x="0" y="0"/>
-          <a:ext cx="0" cy="0"/>
-          <a:chOff x="0" y="0"/>
-          <a:chExt cx="0" cy="0"/>
-        </a:xfrm>
-      </p:grpSpPr>
-      <p:sp>
-        <p:nvSpPr>
-          <p:cNvPr id="2" name="Title 1"/>
-          <p:cNvSpPr>
-            <a:spLocks noGrp="1"/>
-          </p:cNvSpPr>
-          <p:nvPr>
-            <p:ph type="title"/>
-          </p:nvPr>
-        </p:nvSpPr>
-        <p:spPr/>
-        <p:txBody>
-          <a:bodyPr/>
-          <a:lstStyle/>
-          <a:p>
-            <a:pPr lvl="0" indent="0" marL="0">
-              <a:buNone/>
-            </a:pPr>
-            <a:r>
-              <a:rPr/>
-              <a:t>Live today — and it works</a:t>
-            </a:r>
-          </a:p>
-        </p:txBody>
-      </p:sp>
+      <p:grpSpPr/>
       <p:pic>
         <p:nvPicPr>
-          <p:cNvPr descr="assets/scrubless-search.png" id="0" name="Picture 1"/>
+          <p:cNvPr id="2" name="Picture 1" descr="slide-10.png"/>
           <p:cNvPicPr>
-            <a:picLocks noGrp="1" noChangeAspect="1"/>
+            <a:picLocks noChangeAspect="1"/>
           </p:cNvPicPr>
           <p:nvPr/>
         </p:nvPicPr>
@@ -4204,61 +3157,26 @@
             <a:fillRect/>
           </a:stretch>
         </p:blipFill>
-        <p:spPr bwMode="auto">
+        <p:spPr>
           <a:xfrm>
-            <a:off x="1841500" y="1193800"/>
-            <a:ext cx="5461000" cy="2882900"/>
+            <a:off x="0" y="0"/>
+            <a:ext cx="12191695" cy="6858000"/>
           </a:xfrm>
           <a:prstGeom prst="rect">
             <a:avLst/>
           </a:prstGeom>
-          <a:noFill/>
-          <a:ln w="9525">
-            <a:noFill/>
-            <a:headEnd/>
-            <a:tailEnd/>
-          </a:ln>
         </p:spPr>
       </p:pic>
-      <p:sp>
-        <p:nvSpPr>
-          <p:cNvPr id="1" name="TextBox 3"/>
-          <p:cNvSpPr txBox="1"/>
-          <p:nvPr>
-            <p:ph idx="1"/>
-          </p:nvPr>
-        </p:nvSpPr>
-        <p:spPr>
-          <a:xfrm>
-            <a:off x="457200" y="4076700"/>
-            <a:ext cx="8229600" cy="508000"/>
-          </a:xfrm>
-          <a:prstGeom prst="rect">
-            <a:avLst/>
-          </a:prstGeom>
-          <a:noFill/>
-        </p:spPr>
-        <p:txBody>
-          <a:bodyPr/>
-          <a:lstStyle/>
-          <a:p>
-            <a:pPr lvl="0" indent="0" marL="0" algn="ctr">
-              <a:buNone/>
-            </a:pPr>
-            <a:r>
-              <a:rPr/>
-              <a:t>Real search on getscrubless.com: “the big rabbit” → ranked moments with match scores; click one, the player jumps to that second. Shipped to production — not a prototype.</a:t>
-            </a:r>
-          </a:p>
-        </p:txBody>
-      </p:sp>
     </p:spTree>
   </p:cSld>
+  <p:clrMapOvr>
+    <a:masterClrMapping/>
+  </p:clrMapOvr>
 </p:sld>
 </file>
 
-<file path=ppt/slides/slide5.xml><?xml version="1.0" encoding="utf-8"?>
-<p:sld xmlns:a="http://schemas.openxmlformats.org/drawingml/2006/main" xmlns:r="http://schemas.openxmlformats.org/officeDocument/2006/relationships" xmlns:p="http://schemas.openxmlformats.org/presentationml/2006/main">
+<file path=ppt/slides/slide11.xml><?xml version="1.0" encoding="utf-8"?>
+<p:sld xmlns:a="http://schemas.openxmlformats.org/drawingml/2006/main" xmlns:p="http://schemas.openxmlformats.org/presentationml/2006/main" xmlns:r="http://schemas.openxmlformats.org/officeDocument/2006/relationships">
   <p:cSld>
     <p:spTree>
       <p:nvGrpSpPr>
@@ -4266,74 +3184,12 @@
         <p:cNvGrpSpPr/>
         <p:nvPr/>
       </p:nvGrpSpPr>
-      <p:grpSpPr>
-        <a:xfrm>
-          <a:off x="0" y="0"/>
-          <a:ext cx="0" cy="0"/>
-          <a:chOff x="0" y="0"/>
-          <a:chExt cx="0" cy="0"/>
-        </a:xfrm>
-      </p:grpSpPr>
-      <p:sp>
-        <p:nvSpPr>
-          <p:cNvPr id="2" name="Title 1"/>
-          <p:cNvSpPr>
-            <a:spLocks noGrp="1"/>
-          </p:cNvSpPr>
-          <p:nvPr>
-            <p:ph type="title"/>
-          </p:nvPr>
-        </p:nvSpPr>
-        <p:spPr>
-          <a:xfrm>
-            <a:off x="457201" y="204787"/>
-            <a:ext cx="3008313" cy="871538"/>
-          </a:xfrm>
-        </p:spPr>
-        <p:txBody>
-          <a:bodyPr/>
-          <a:lstStyle/>
-          <a:p>
-            <a:pPr lvl="0" indent="0" marL="0">
-              <a:buNone/>
-            </a:pPr>
-            <a:r>
-              <a:rPr/>
-              <a:t>How it works</a:t>
-            </a:r>
-          </a:p>
-        </p:txBody>
-      </p:sp>
-      <p:sp>
-        <p:nvSpPr>
-          <p:cNvPr id="4" name="Text Placeholder 3"/>
-          <p:cNvSpPr>
-            <a:spLocks noGrp="1"/>
-          </p:cNvSpPr>
-          <p:nvPr>
-            <p:ph idx="2" sz="half" type="body"/>
-          </p:nvPr>
-        </p:nvSpPr>
-        <p:spPr/>
-        <p:txBody>
-          <a:bodyPr/>
-          <a:lstStyle/>
-          <a:p>
-            <a:pPr lvl="0" indent="0" marL="0">
-              <a:buNone/>
-            </a:pPr>
-            <a:r>
-              <a:rPr/>
-              <a:t>One pipeline turns every video into three searchable signals.</a:t>
-            </a:r>
-          </a:p>
-        </p:txBody>
-      </p:sp>
+      <p:grpSpPr/>
       <p:pic>
         <p:nvPicPr>
-          <p:cNvPr descr="assets/pitch-flow.png" id="0" name="Picture 1"/>
+          <p:cNvPr id="2" name="Picture 1" descr="slide-11.png"/>
           <p:cNvPicPr>
-            <a:picLocks noGrp="1" noChangeAspect="1"/>
+            <a:picLocks noChangeAspect="1"/>
           </p:cNvPicPr>
           <p:nvPr/>
         </p:nvPicPr>
@@ -4343,61 +3199,26 @@
             <a:fillRect/>
           </a:stretch>
         </p:blipFill>
-        <p:spPr bwMode="auto">
+        <p:spPr>
           <a:xfrm>
-            <a:off x="3568700" y="1701800"/>
-            <a:ext cx="5105400" cy="876300"/>
+            <a:off x="0" y="0"/>
+            <a:ext cx="12191695" cy="6858000"/>
           </a:xfrm>
           <a:prstGeom prst="rect">
             <a:avLst/>
           </a:prstGeom>
-          <a:noFill/>
-          <a:ln w="9525">
-            <a:noFill/>
-            <a:headEnd/>
-            <a:tailEnd/>
-          </a:ln>
         </p:spPr>
       </p:pic>
-      <p:sp>
-        <p:nvSpPr>
-          <p:cNvPr id="1" name="TextBox 3"/>
-          <p:cNvSpPr txBox="1"/>
-          <p:nvPr>
-            <p:ph idx="1"/>
-          </p:nvPr>
-        </p:nvSpPr>
-        <p:spPr>
-          <a:xfrm>
-            <a:off x="3568700" y="4076700"/>
-            <a:ext cx="5105400" cy="508000"/>
-          </a:xfrm>
-          <a:prstGeom prst="rect">
-            <a:avLst/>
-          </a:prstGeom>
-          <a:noFill/>
-        </p:spPr>
-        <p:txBody>
-          <a:bodyPr/>
-          <a:lstStyle/>
-          <a:p>
-            <a:pPr lvl="0" indent="0" marL="0" algn="ctr">
-              <a:buNone/>
-            </a:pPr>
-            <a:r>
-              <a:rPr/>
-              <a:t>Frames become CLIP vectors (the visuals), audio becomes a Whisper transcript (the words), and Claude turns retrieved moments into cited answers. One search box over all of it.</a:t>
-            </a:r>
-          </a:p>
-        </p:txBody>
-      </p:sp>
     </p:spTree>
   </p:cSld>
+  <p:clrMapOvr>
+    <a:masterClrMapping/>
+  </p:clrMapOvr>
 </p:sld>
 </file>
 
-<file path=ppt/slides/slide6.xml><?xml version="1.0" encoding="utf-8"?>
-<p:sld xmlns:a="http://schemas.openxmlformats.org/drawingml/2006/main" xmlns:r="http://schemas.openxmlformats.org/officeDocument/2006/relationships" xmlns:p="http://schemas.openxmlformats.org/presentationml/2006/main">
+<file path=ppt/slides/slide12.xml><?xml version="1.0" encoding="utf-8"?>
+<p:sld xmlns:a="http://schemas.openxmlformats.org/drawingml/2006/main" xmlns:p="http://schemas.openxmlformats.org/presentationml/2006/main" xmlns:r="http://schemas.openxmlformats.org/officeDocument/2006/relationships">
   <p:cSld>
     <p:spTree>
       <p:nvGrpSpPr>
@@ -4405,302 +3226,12 @@
         <p:cNvGrpSpPr/>
         <p:nvPr/>
       </p:nvGrpSpPr>
-      <p:grpSpPr>
-        <a:xfrm>
-          <a:off x="0" y="0"/>
-          <a:ext cx="0" cy="0"/>
-          <a:chOff x="0" y="0"/>
-          <a:chExt cx="0" cy="0"/>
-        </a:xfrm>
-      </p:grpSpPr>
-      <p:sp>
-        <p:nvSpPr>
-          <p:cNvPr id="2" name="Title 1"/>
-          <p:cNvSpPr>
-            <a:spLocks noGrp="1"/>
-          </p:cNvSpPr>
-          <p:nvPr>
-            <p:ph type="title"/>
-          </p:nvPr>
-        </p:nvSpPr>
-        <p:spPr/>
-        <p:txBody>
-          <a:bodyPr/>
-          <a:lstStyle/>
-          <a:p>
-            <a:pPr lvl="0" indent="0" marL="0">
-              <a:buNone/>
-            </a:pPr>
-            <a:r>
-              <a:rPr/>
-              <a:t>More than search</a:t>
-            </a:r>
-          </a:p>
-        </p:txBody>
-      </p:sp>
-      <p:sp>
-        <p:nvSpPr>
-          <p:cNvPr id="3" name="Content Placeholder 2"/>
-          <p:cNvSpPr>
-            <a:spLocks noGrp="1"/>
-          </p:cNvSpPr>
-          <p:nvPr>
-            <p:ph idx="1"/>
-          </p:nvPr>
-        </p:nvSpPr>
-        <p:spPr/>
-        <p:txBody>
-          <a:bodyPr/>
-          <a:lstStyle/>
-          <a:p>
-            <a:pPr lvl="0" indent="0" marL="0">
-              <a:buNone/>
-            </a:pPr>
-            <a:r>
-              <a:rPr/>
-              <a:t>Once a video is indexed, the hard part is done — everything else is free.</a:t>
-            </a:r>
-          </a:p>
-          <a:p>
-            <a:pPr lvl="0"/>
-            <a:r>
-              <a:rPr b="1"/>
-              <a:t>Library mode</a:t>
-            </a:r>
-            <a:r>
-              <a:rPr/>
-              <a:t> — search across an </a:t>
-            </a:r>
-            <a:r>
-              <a:rPr i="1"/>
-              <a:t>entire folder</a:t>
-            </a:r>
-            <a:r>
-              <a:rPr/>
-              <a:t> of videos at once.</a:t>
-            </a:r>
-          </a:p>
-          <a:p>
-            <a:pPr lvl="0"/>
-            <a:r>
-              <a:rPr b="1"/>
-              <a:t>Ask</a:t>
-            </a:r>
-            <a:r>
-              <a:rPr/>
-              <a:t> — questions answered in prose, with clickable cited timestamps.</a:t>
-            </a:r>
-          </a:p>
-          <a:p>
-            <a:pPr lvl="0"/>
-            <a:r>
-              <a:rPr b="1"/>
-              <a:t>Auto-chapters &amp; summaries</a:t>
-            </a:r>
-            <a:r>
-              <a:rPr/>
-              <a:t> generated on every upload.</a:t>
-            </a:r>
-          </a:p>
-          <a:p>
-            <a:pPr lvl="0"/>
-            <a:r>
-              <a:rPr b="1"/>
-              <a:t>Highlight reels</a:t>
-            </a:r>
-            <a:r>
-              <a:rPr/>
-              <a:t> — stitch the best moments into a shareable clip.</a:t>
-            </a:r>
-          </a:p>
-          <a:p>
-            <a:pPr lvl="0" indent="0" marL="1270000">
-              <a:buNone/>
-            </a:pPr>
-            <a:r>
-              <a:rPr sz="2000"/>
-              <a:t>Index once. Search, ask, summarize, and cut — from the same index.</a:t>
-            </a:r>
-          </a:p>
-        </p:txBody>
-      </p:sp>
-    </p:spTree>
-  </p:cSld>
-</p:sld>
-</file>
-
-<file path=ppt/slides/slide7.xml><?xml version="1.0" encoding="utf-8"?>
-<p:sld xmlns:a="http://schemas.openxmlformats.org/drawingml/2006/main" xmlns:r="http://schemas.openxmlformats.org/officeDocument/2006/relationships" xmlns:p="http://schemas.openxmlformats.org/presentationml/2006/main">
-  <p:cSld>
-    <p:spTree>
-      <p:nvGrpSpPr>
-        <p:cNvPr id="1" name=""/>
-        <p:cNvGrpSpPr/>
-        <p:nvPr/>
-      </p:nvGrpSpPr>
-      <p:grpSpPr>
-        <a:xfrm>
-          <a:off x="0" y="0"/>
-          <a:ext cx="0" cy="0"/>
-          <a:chOff x="0" y="0"/>
-          <a:chExt cx="0" cy="0"/>
-        </a:xfrm>
-      </p:grpSpPr>
-      <p:sp>
-        <p:nvSpPr>
-          <p:cNvPr id="2" name="Title 1"/>
-          <p:cNvSpPr>
-            <a:spLocks noGrp="1"/>
-          </p:cNvSpPr>
-          <p:nvPr>
-            <p:ph type="title"/>
-          </p:nvPr>
-        </p:nvSpPr>
-        <p:spPr/>
-        <p:txBody>
-          <a:bodyPr/>
-          <a:lstStyle/>
-          <a:p>
-            <a:pPr lvl="0" indent="0" marL="0">
-              <a:buNone/>
-            </a:pPr>
-            <a:r>
-              <a:rPr/>
-              <a:t>Why now</a:t>
-            </a:r>
-          </a:p>
-        </p:txBody>
-      </p:sp>
-      <p:sp>
-        <p:nvSpPr>
-          <p:cNvPr id="3" name="Content Placeholder 2"/>
-          <p:cNvSpPr>
-            <a:spLocks noGrp="1"/>
-          </p:cNvSpPr>
-          <p:nvPr>
-            <p:ph idx="1"/>
-          </p:nvPr>
-        </p:nvSpPr>
-        <p:spPr/>
-        <p:txBody>
-          <a:bodyPr/>
-          <a:lstStyle/>
-          <a:p>
-            <a:pPr lvl="0" indent="0" marL="0">
-              <a:buNone/>
-            </a:pPr>
-            <a:r>
-              <a:rPr/>
-              <a:t>The pieces only just became cheap enough to put in one small app.</a:t>
-            </a:r>
-          </a:p>
-          <a:p>
-            <a:pPr lvl="0"/>
-            <a:r>
-              <a:rPr b="1"/>
-              <a:t>Multimodal embeddings</a:t>
-            </a:r>
-            <a:r>
-              <a:rPr/>
-              <a:t> (CLIP) are good, fast, and open.</a:t>
-            </a:r>
-          </a:p>
-          <a:p>
-            <a:pPr lvl="0"/>
-            <a:r>
-              <a:rPr b="1"/>
-              <a:t>Whisper</a:t>
-            </a:r>
-            <a:r>
-              <a:rPr/>
-              <a:t> drove transcription cost toward zero.</a:t>
-            </a:r>
-          </a:p>
-          <a:p>
-            <a:pPr lvl="0"/>
-            <a:r>
-              <a:rPr b="1"/>
-              <a:t>LLMs</a:t>
-            </a:r>
-            <a:r>
-              <a:rPr/>
-              <a:t> (Claude) can now reason over retrieved moments and cite them.</a:t>
-            </a:r>
-          </a:p>
-          <a:p>
-            <a:pPr lvl="0"/>
-            <a:r>
-              <a:rPr b="1"/>
-              <a:t>Video volume</a:t>
-            </a:r>
-            <a:r>
-              <a:rPr/>
-              <a:t> is compounding while tooling stays stuck on scrubbing.</a:t>
-            </a:r>
-          </a:p>
-          <a:p>
-            <a:pPr lvl="0" indent="0" marL="0">
-              <a:buNone/>
-            </a:pPr>
-            <a:r>
-              <a:rPr b="1"/>
-              <a:t>The tech is finally ready — and we’ve already shipped on it.</a:t>
-            </a:r>
-          </a:p>
-        </p:txBody>
-      </p:sp>
-    </p:spTree>
-  </p:cSld>
-</p:sld>
-</file>
-
-<file path=ppt/slides/slide8.xml><?xml version="1.0" encoding="utf-8"?>
-<p:sld xmlns:a="http://schemas.openxmlformats.org/drawingml/2006/main" xmlns:r="http://schemas.openxmlformats.org/officeDocument/2006/relationships" xmlns:p="http://schemas.openxmlformats.org/presentationml/2006/main">
-  <p:cSld>
-    <p:spTree>
-      <p:nvGrpSpPr>
-        <p:cNvPr id="1" name=""/>
-        <p:cNvGrpSpPr/>
-        <p:nvPr/>
-      </p:nvGrpSpPr>
-      <p:grpSpPr>
-        <a:xfrm>
-          <a:off x="0" y="0"/>
-          <a:ext cx="0" cy="0"/>
-          <a:chOff x="0" y="0"/>
-          <a:chExt cx="0" cy="0"/>
-        </a:xfrm>
-      </p:grpSpPr>
-      <p:sp>
-        <p:nvSpPr>
-          <p:cNvPr id="2" name="Title 1"/>
-          <p:cNvSpPr>
-            <a:spLocks noGrp="1"/>
-          </p:cNvSpPr>
-          <p:nvPr>
-            <p:ph type="title"/>
-          </p:nvPr>
-        </p:nvSpPr>
-        <p:spPr/>
-        <p:txBody>
-          <a:bodyPr/>
-          <a:lstStyle/>
-          <a:p>
-            <a:pPr lvl="0" indent="0" marL="0">
-              <a:buNone/>
-            </a:pPr>
-            <a:r>
-              <a:rPr/>
-              <a:t>Market</a:t>
-            </a:r>
-          </a:p>
-        </p:txBody>
-      </p:sp>
+      <p:grpSpPr/>
       <p:pic>
         <p:nvPicPr>
-          <p:cNvPr descr="assets/market.png" id="0" name="Picture 1"/>
+          <p:cNvPr id="2" name="Picture 1" descr="slide-12.png"/>
           <p:cNvPicPr>
-            <a:picLocks noGrp="1" noChangeAspect="1"/>
+            <a:picLocks noChangeAspect="1"/>
           </p:cNvPicPr>
           <p:nvPr/>
         </p:nvPicPr>
@@ -4710,115 +3241,26 @@
             <a:fillRect/>
           </a:stretch>
         </p:blipFill>
-        <p:spPr bwMode="auto">
+        <p:spPr>
           <a:xfrm>
-            <a:off x="787400" y="1193800"/>
-            <a:ext cx="3390900" cy="3390900"/>
+            <a:off x="0" y="0"/>
+            <a:ext cx="12191695" cy="6858000"/>
           </a:xfrm>
           <a:prstGeom prst="rect">
             <a:avLst/>
           </a:prstGeom>
-          <a:noFill/>
-          <a:ln w="9525">
-            <a:noFill/>
-            <a:headEnd/>
-            <a:tailEnd/>
-          </a:ln>
         </p:spPr>
       </p:pic>
-      <p:sp>
-        <p:nvSpPr>
-          <p:cNvPr id="4" name="Content Placeholder 3"/>
-          <p:cNvSpPr>
-            <a:spLocks noGrp="1"/>
-          </p:cNvSpPr>
-          <p:nvPr>
-            <p:ph idx="2" sz="half"/>
-          </p:nvPr>
-        </p:nvSpPr>
-        <p:spPr/>
-        <p:txBody>
-          <a:bodyPr/>
-          <a:lstStyle/>
-          <a:p>
-            <a:pPr lvl="0" indent="0" marL="0">
-              <a:buNone/>
-            </a:pPr>
-            <a:r>
-              <a:rPr b="1"/>
-              <a:t>TAM ≈ $30B / year</a:t>
-            </a:r>
-            <a:r>
-              <a:rPr/>
-              <a:t> — the spend on making video findable.</a:t>
-            </a:r>
-          </a:p>
-          <a:p>
-            <a:pPr lvl="0"/>
-            <a:r>
-              <a:rPr b="1"/>
-              <a:t>Bottom-up:</a:t>
-            </a:r>
-            <a:r>
-              <a:rPr/>
-              <a:t> 50M creators × $240/yr </a:t>
-            </a:r>
-            <a:r>
-              <a:rPr b="1"/>
-              <a:t>+</a:t>
-            </a:r>
-            <a:r>
-              <a:rPr/>
-              <a:t> 30M businesses × $600/yr.</a:t>
-            </a:r>
-          </a:p>
-          <a:p>
-            <a:pPr lvl="0"/>
-            <a:r>
-              <a:rPr b="1"/>
-              <a:t>Beachhead:</a:t>
-            </a:r>
-            <a:r>
-              <a:rPr/>
-              <a:t> 20K heavy-library creators → </a:t>
-            </a:r>
-            <a:r>
-              <a:rPr b="1"/>
-              <a:t>≈$4.8M ARR</a:t>
-            </a:r>
-            <a:r>
-              <a:rPr/>
-              <a:t> reachable now; SOM 200K → </a:t>
-            </a:r>
-            <a:r>
-              <a:rPr b="1"/>
-              <a:t>≈$48M</a:t>
-            </a:r>
-            <a:r>
-              <a:rPr/>
-              <a:t>.</a:t>
-            </a:r>
-          </a:p>
-          <a:p>
-            <a:pPr lvl="0"/>
-            <a:r>
-              <a:rPr b="1"/>
-              <a:t>Cross-check:</a:t>
-            </a:r>
-            <a:r>
-              <a:rPr/>
-              <a:t> DAM ≈$5B · search ≈$6B · video intelligence ≈$11B — same order of magnitude.</a:t>
-            </a:r>
-          </a:p>
-        </p:txBody>
-      </p:sp>
     </p:spTree>
   </p:cSld>
+  <p:clrMapOvr>
+    <a:masterClrMapping/>
+  </p:clrMapOvr>
 </p:sld>
 </file>
 
-<file path=ppt/slides/slide9.xml><?xml version="1.0" encoding="utf-8"?>
-<p:sld xmlns:a="http://schemas.openxmlformats.org/drawingml/2006/main" xmlns:r="http://schemas.openxmlformats.org/officeDocument/2006/relationships" xmlns:p="http://schemas.openxmlformats.org/presentationml/2006/main">
+<file path=ppt/slides/slide13.xml><?xml version="1.0" encoding="utf-8"?>
+<p:sld xmlns:a="http://schemas.openxmlformats.org/drawingml/2006/main" xmlns:p="http://schemas.openxmlformats.org/presentationml/2006/main" xmlns:r="http://schemas.openxmlformats.org/officeDocument/2006/relationships">
   <p:cSld>
     <p:spTree>
       <p:nvGrpSpPr>
@@ -4826,145 +3268,414 @@
         <p:cNvGrpSpPr/>
         <p:nvPr/>
       </p:nvGrpSpPr>
-      <p:grpSpPr>
-        <a:xfrm>
-          <a:off x="0" y="0"/>
-          <a:ext cx="0" cy="0"/>
-          <a:chOff x="0" y="0"/>
-          <a:chExt cx="0" cy="0"/>
-        </a:xfrm>
-      </p:grpSpPr>
-      <p:sp>
-        <p:nvSpPr>
-          <p:cNvPr id="2" name="Title 1"/>
-          <p:cNvSpPr>
-            <a:spLocks noGrp="1"/>
-          </p:cNvSpPr>
-          <p:nvPr>
-            <p:ph type="title"/>
-          </p:nvPr>
-        </p:nvSpPr>
-        <p:spPr/>
-        <p:txBody>
-          <a:bodyPr/>
-          <a:lstStyle/>
-          <a:p>
-            <a:pPr lvl="0" indent="0" marL="0">
-              <a:buNone/>
-            </a:pPr>
-            <a:r>
-              <a:rPr/>
-              <a:t>Traction</a:t>
-            </a:r>
-          </a:p>
-        </p:txBody>
-      </p:sp>
-      <p:sp>
-        <p:nvSpPr>
-          <p:cNvPr id="3" name="Content Placeholder 2"/>
-          <p:cNvSpPr>
-            <a:spLocks noGrp="1"/>
-          </p:cNvSpPr>
-          <p:nvPr>
-            <p:ph idx="1"/>
-          </p:nvPr>
-        </p:nvSpPr>
-        <p:spPr/>
-        <p:txBody>
-          <a:bodyPr/>
-          <a:lstStyle/>
-          <a:p>
-            <a:pPr lvl="0" indent="0" marL="0">
-              <a:buNone/>
-            </a:pPr>
-            <a:r>
-              <a:rPr b="1"/>
-              <a:t>Shipped and live</a:t>
-            </a:r>
-            <a:r>
-              <a:rPr/>
-              <a:t> at getscrubless.com:</a:t>
-            </a:r>
-          </a:p>
-          <a:p>
-            <a:pPr lvl="0"/>
-            <a:r>
-              <a:rPr/>
-              <a:t>V1 search, V2 library mode, V3 Q&amp;A / chapters / reels — all in production.</a:t>
-            </a:r>
-          </a:p>
-          <a:p>
-            <a:pPr lvl="0"/>
-            <a:r>
-              <a:rPr/>
-              <a:t>Auth + Stripe billing working; durable per-user storage.</a:t>
-            </a:r>
-          </a:p>
-          <a:p>
-            <a:pPr lvl="0" indent="0" marL="0">
-              <a:buNone/>
-            </a:pPr>
-            <a:r>
-              <a:rPr b="1"/>
-              <a:t>Targets — next two quarters, post public launch:</a:t>
-            </a:r>
-          </a:p>
-          <a:p>
-            <a:pPr lvl="0"/>
-            <a:r>
-              <a:rPr b="1"/>
-              <a:t>1,000</a:t>
-            </a:r>
-            <a:r>
-              <a:rPr/>
-              <a:t> signups in the first 90 days (Show HN / Product Hunt).</a:t>
-            </a:r>
-          </a:p>
-          <a:p>
-            <a:pPr lvl="0"/>
-            <a:r>
-              <a:rPr b="1"/>
-              <a:t>100</a:t>
-            </a:r>
-            <a:r>
-              <a:rPr/>
-              <a:t> paying customers and </a:t>
-            </a:r>
-            <a:r>
-              <a:rPr b="1"/>
-              <a:t>$2K MRR</a:t>
-            </a:r>
-            <a:r>
-              <a:rPr/>
-              <a:t> by end of Q3 2026.</a:t>
-            </a:r>
-          </a:p>
-          <a:p>
-            <a:pPr lvl="0"/>
-            <a:r>
-              <a:rPr b="1"/>
-              <a:t>10,000</a:t>
-            </a:r>
-            <a:r>
-              <a:rPr/>
-              <a:t> hours of video indexed.</a:t>
-            </a:r>
-          </a:p>
-          <a:p>
-            <a:pPr lvl="0"/>
-            <a:r>
-              <a:rPr b="1"/>
-              <a:t>40%</a:t>
-            </a:r>
-            <a:r>
-              <a:rPr/>
-              <a:t> week-4 retention on activated users.</a:t>
-            </a:r>
-          </a:p>
-        </p:txBody>
-      </p:sp>
+      <p:grpSpPr/>
+      <p:pic>
+        <p:nvPicPr>
+          <p:cNvPr id="2" name="Picture 1" descr="slide-13.png"/>
+          <p:cNvPicPr>
+            <a:picLocks noChangeAspect="1"/>
+          </p:cNvPicPr>
+          <p:nvPr/>
+        </p:nvPicPr>
+        <p:blipFill>
+          <a:blip r:embed="rId2"/>
+          <a:stretch>
+            <a:fillRect/>
+          </a:stretch>
+        </p:blipFill>
+        <p:spPr>
+          <a:xfrm>
+            <a:off x="0" y="0"/>
+            <a:ext cx="12191695" cy="6858000"/>
+          </a:xfrm>
+          <a:prstGeom prst="rect">
+            <a:avLst/>
+          </a:prstGeom>
+        </p:spPr>
+      </p:pic>
     </p:spTree>
   </p:cSld>
+  <p:clrMapOvr>
+    <a:masterClrMapping/>
+  </p:clrMapOvr>
+</p:sld>
+</file>
+
+<file path=ppt/slides/slide14.xml><?xml version="1.0" encoding="utf-8"?>
+<p:sld xmlns:a="http://schemas.openxmlformats.org/drawingml/2006/main" xmlns:p="http://schemas.openxmlformats.org/presentationml/2006/main" xmlns:r="http://schemas.openxmlformats.org/officeDocument/2006/relationships">
+  <p:cSld>
+    <p:spTree>
+      <p:nvGrpSpPr>
+        <p:cNvPr id="1" name=""/>
+        <p:cNvGrpSpPr/>
+        <p:nvPr/>
+      </p:nvGrpSpPr>
+      <p:grpSpPr/>
+      <p:pic>
+        <p:nvPicPr>
+          <p:cNvPr id="2" name="Picture 1" descr="slide-14.png"/>
+          <p:cNvPicPr>
+            <a:picLocks noChangeAspect="1"/>
+          </p:cNvPicPr>
+          <p:nvPr/>
+        </p:nvPicPr>
+        <p:blipFill>
+          <a:blip r:embed="rId2"/>
+          <a:stretch>
+            <a:fillRect/>
+          </a:stretch>
+        </p:blipFill>
+        <p:spPr>
+          <a:xfrm>
+            <a:off x="0" y="0"/>
+            <a:ext cx="12191695" cy="6858000"/>
+          </a:xfrm>
+          <a:prstGeom prst="rect">
+            <a:avLst/>
+          </a:prstGeom>
+        </p:spPr>
+      </p:pic>
+    </p:spTree>
+  </p:cSld>
+  <p:clrMapOvr>
+    <a:masterClrMapping/>
+  </p:clrMapOvr>
+</p:sld>
+</file>
+
+<file path=ppt/slides/slide2.xml><?xml version="1.0" encoding="utf-8"?>
+<p:sld xmlns:a="http://schemas.openxmlformats.org/drawingml/2006/main" xmlns:p="http://schemas.openxmlformats.org/presentationml/2006/main" xmlns:r="http://schemas.openxmlformats.org/officeDocument/2006/relationships">
+  <p:cSld>
+    <p:spTree>
+      <p:nvGrpSpPr>
+        <p:cNvPr id="1" name=""/>
+        <p:cNvGrpSpPr/>
+        <p:nvPr/>
+      </p:nvGrpSpPr>
+      <p:grpSpPr/>
+      <p:pic>
+        <p:nvPicPr>
+          <p:cNvPr id="2" name="Picture 1" descr="slide-02.png"/>
+          <p:cNvPicPr>
+            <a:picLocks noChangeAspect="1"/>
+          </p:cNvPicPr>
+          <p:nvPr/>
+        </p:nvPicPr>
+        <p:blipFill>
+          <a:blip r:embed="rId2"/>
+          <a:stretch>
+            <a:fillRect/>
+          </a:stretch>
+        </p:blipFill>
+        <p:spPr>
+          <a:xfrm>
+            <a:off x="0" y="0"/>
+            <a:ext cx="12191695" cy="6858000"/>
+          </a:xfrm>
+          <a:prstGeom prst="rect">
+            <a:avLst/>
+          </a:prstGeom>
+        </p:spPr>
+      </p:pic>
+    </p:spTree>
+  </p:cSld>
+  <p:clrMapOvr>
+    <a:masterClrMapping/>
+  </p:clrMapOvr>
+</p:sld>
+</file>
+
+<file path=ppt/slides/slide3.xml><?xml version="1.0" encoding="utf-8"?>
+<p:sld xmlns:a="http://schemas.openxmlformats.org/drawingml/2006/main" xmlns:p="http://schemas.openxmlformats.org/presentationml/2006/main" xmlns:r="http://schemas.openxmlformats.org/officeDocument/2006/relationships">
+  <p:cSld>
+    <p:spTree>
+      <p:nvGrpSpPr>
+        <p:cNvPr id="1" name=""/>
+        <p:cNvGrpSpPr/>
+        <p:nvPr/>
+      </p:nvGrpSpPr>
+      <p:grpSpPr/>
+      <p:pic>
+        <p:nvPicPr>
+          <p:cNvPr id="2" name="Picture 1" descr="slide-03.png"/>
+          <p:cNvPicPr>
+            <a:picLocks noChangeAspect="1"/>
+          </p:cNvPicPr>
+          <p:nvPr/>
+        </p:nvPicPr>
+        <p:blipFill>
+          <a:blip r:embed="rId2"/>
+          <a:stretch>
+            <a:fillRect/>
+          </a:stretch>
+        </p:blipFill>
+        <p:spPr>
+          <a:xfrm>
+            <a:off x="0" y="0"/>
+            <a:ext cx="12191695" cy="6858000"/>
+          </a:xfrm>
+          <a:prstGeom prst="rect">
+            <a:avLst/>
+          </a:prstGeom>
+        </p:spPr>
+      </p:pic>
+    </p:spTree>
+  </p:cSld>
+  <p:clrMapOvr>
+    <a:masterClrMapping/>
+  </p:clrMapOvr>
+</p:sld>
+</file>
+
+<file path=ppt/slides/slide4.xml><?xml version="1.0" encoding="utf-8"?>
+<p:sld xmlns:a="http://schemas.openxmlformats.org/drawingml/2006/main" xmlns:p="http://schemas.openxmlformats.org/presentationml/2006/main" xmlns:r="http://schemas.openxmlformats.org/officeDocument/2006/relationships">
+  <p:cSld>
+    <p:spTree>
+      <p:nvGrpSpPr>
+        <p:cNvPr id="1" name=""/>
+        <p:cNvGrpSpPr/>
+        <p:nvPr/>
+      </p:nvGrpSpPr>
+      <p:grpSpPr/>
+      <p:pic>
+        <p:nvPicPr>
+          <p:cNvPr id="2" name="Picture 1" descr="slide-04.png"/>
+          <p:cNvPicPr>
+            <a:picLocks noChangeAspect="1"/>
+          </p:cNvPicPr>
+          <p:nvPr/>
+        </p:nvPicPr>
+        <p:blipFill>
+          <a:blip r:embed="rId2"/>
+          <a:stretch>
+            <a:fillRect/>
+          </a:stretch>
+        </p:blipFill>
+        <p:spPr>
+          <a:xfrm>
+            <a:off x="0" y="0"/>
+            <a:ext cx="12191695" cy="6858000"/>
+          </a:xfrm>
+          <a:prstGeom prst="rect">
+            <a:avLst/>
+          </a:prstGeom>
+        </p:spPr>
+      </p:pic>
+    </p:spTree>
+  </p:cSld>
+  <p:clrMapOvr>
+    <a:masterClrMapping/>
+  </p:clrMapOvr>
+</p:sld>
+</file>
+
+<file path=ppt/slides/slide5.xml><?xml version="1.0" encoding="utf-8"?>
+<p:sld xmlns:a="http://schemas.openxmlformats.org/drawingml/2006/main" xmlns:p="http://schemas.openxmlformats.org/presentationml/2006/main" xmlns:r="http://schemas.openxmlformats.org/officeDocument/2006/relationships">
+  <p:cSld>
+    <p:spTree>
+      <p:nvGrpSpPr>
+        <p:cNvPr id="1" name=""/>
+        <p:cNvGrpSpPr/>
+        <p:nvPr/>
+      </p:nvGrpSpPr>
+      <p:grpSpPr/>
+      <p:pic>
+        <p:nvPicPr>
+          <p:cNvPr id="2" name="Picture 1" descr="slide-05.png"/>
+          <p:cNvPicPr>
+            <a:picLocks noChangeAspect="1"/>
+          </p:cNvPicPr>
+          <p:nvPr/>
+        </p:nvPicPr>
+        <p:blipFill>
+          <a:blip r:embed="rId2"/>
+          <a:stretch>
+            <a:fillRect/>
+          </a:stretch>
+        </p:blipFill>
+        <p:spPr>
+          <a:xfrm>
+            <a:off x="0" y="0"/>
+            <a:ext cx="12191695" cy="6858000"/>
+          </a:xfrm>
+          <a:prstGeom prst="rect">
+            <a:avLst/>
+          </a:prstGeom>
+        </p:spPr>
+      </p:pic>
+    </p:spTree>
+  </p:cSld>
+  <p:clrMapOvr>
+    <a:masterClrMapping/>
+  </p:clrMapOvr>
+</p:sld>
+</file>
+
+<file path=ppt/slides/slide6.xml><?xml version="1.0" encoding="utf-8"?>
+<p:sld xmlns:a="http://schemas.openxmlformats.org/drawingml/2006/main" xmlns:p="http://schemas.openxmlformats.org/presentationml/2006/main" xmlns:r="http://schemas.openxmlformats.org/officeDocument/2006/relationships">
+  <p:cSld>
+    <p:spTree>
+      <p:nvGrpSpPr>
+        <p:cNvPr id="1" name=""/>
+        <p:cNvGrpSpPr/>
+        <p:nvPr/>
+      </p:nvGrpSpPr>
+      <p:grpSpPr/>
+      <p:pic>
+        <p:nvPicPr>
+          <p:cNvPr id="2" name="Picture 1" descr="slide-06.png"/>
+          <p:cNvPicPr>
+            <a:picLocks noChangeAspect="1"/>
+          </p:cNvPicPr>
+          <p:nvPr/>
+        </p:nvPicPr>
+        <p:blipFill>
+          <a:blip r:embed="rId2"/>
+          <a:stretch>
+            <a:fillRect/>
+          </a:stretch>
+        </p:blipFill>
+        <p:spPr>
+          <a:xfrm>
+            <a:off x="0" y="0"/>
+            <a:ext cx="12191695" cy="6858000"/>
+          </a:xfrm>
+          <a:prstGeom prst="rect">
+            <a:avLst/>
+          </a:prstGeom>
+        </p:spPr>
+      </p:pic>
+    </p:spTree>
+  </p:cSld>
+  <p:clrMapOvr>
+    <a:masterClrMapping/>
+  </p:clrMapOvr>
+</p:sld>
+</file>
+
+<file path=ppt/slides/slide7.xml><?xml version="1.0" encoding="utf-8"?>
+<p:sld xmlns:a="http://schemas.openxmlformats.org/drawingml/2006/main" xmlns:p="http://schemas.openxmlformats.org/presentationml/2006/main" xmlns:r="http://schemas.openxmlformats.org/officeDocument/2006/relationships">
+  <p:cSld>
+    <p:spTree>
+      <p:nvGrpSpPr>
+        <p:cNvPr id="1" name=""/>
+        <p:cNvGrpSpPr/>
+        <p:nvPr/>
+      </p:nvGrpSpPr>
+      <p:grpSpPr/>
+      <p:pic>
+        <p:nvPicPr>
+          <p:cNvPr id="2" name="Picture 1" descr="slide-07.png"/>
+          <p:cNvPicPr>
+            <a:picLocks noChangeAspect="1"/>
+          </p:cNvPicPr>
+          <p:nvPr/>
+        </p:nvPicPr>
+        <p:blipFill>
+          <a:blip r:embed="rId2"/>
+          <a:stretch>
+            <a:fillRect/>
+          </a:stretch>
+        </p:blipFill>
+        <p:spPr>
+          <a:xfrm>
+            <a:off x="0" y="0"/>
+            <a:ext cx="12191695" cy="6858000"/>
+          </a:xfrm>
+          <a:prstGeom prst="rect">
+            <a:avLst/>
+          </a:prstGeom>
+        </p:spPr>
+      </p:pic>
+    </p:spTree>
+  </p:cSld>
+  <p:clrMapOvr>
+    <a:masterClrMapping/>
+  </p:clrMapOvr>
+</p:sld>
+</file>
+
+<file path=ppt/slides/slide8.xml><?xml version="1.0" encoding="utf-8"?>
+<p:sld xmlns:a="http://schemas.openxmlformats.org/drawingml/2006/main" xmlns:p="http://schemas.openxmlformats.org/presentationml/2006/main" xmlns:r="http://schemas.openxmlformats.org/officeDocument/2006/relationships">
+  <p:cSld>
+    <p:spTree>
+      <p:nvGrpSpPr>
+        <p:cNvPr id="1" name=""/>
+        <p:cNvGrpSpPr/>
+        <p:nvPr/>
+      </p:nvGrpSpPr>
+      <p:grpSpPr/>
+      <p:pic>
+        <p:nvPicPr>
+          <p:cNvPr id="2" name="Picture 1" descr="slide-08.png"/>
+          <p:cNvPicPr>
+            <a:picLocks noChangeAspect="1"/>
+          </p:cNvPicPr>
+          <p:nvPr/>
+        </p:nvPicPr>
+        <p:blipFill>
+          <a:blip r:embed="rId2"/>
+          <a:stretch>
+            <a:fillRect/>
+          </a:stretch>
+        </p:blipFill>
+        <p:spPr>
+          <a:xfrm>
+            <a:off x="0" y="0"/>
+            <a:ext cx="12191695" cy="6858000"/>
+          </a:xfrm>
+          <a:prstGeom prst="rect">
+            <a:avLst/>
+          </a:prstGeom>
+        </p:spPr>
+      </p:pic>
+    </p:spTree>
+  </p:cSld>
+  <p:clrMapOvr>
+    <a:masterClrMapping/>
+  </p:clrMapOvr>
+</p:sld>
+</file>
+
+<file path=ppt/slides/slide9.xml><?xml version="1.0" encoding="utf-8"?>
+<p:sld xmlns:a="http://schemas.openxmlformats.org/drawingml/2006/main" xmlns:p="http://schemas.openxmlformats.org/presentationml/2006/main" xmlns:r="http://schemas.openxmlformats.org/officeDocument/2006/relationships">
+  <p:cSld>
+    <p:spTree>
+      <p:nvGrpSpPr>
+        <p:cNvPr id="1" name=""/>
+        <p:cNvGrpSpPr/>
+        <p:nvPr/>
+      </p:nvGrpSpPr>
+      <p:grpSpPr/>
+      <p:pic>
+        <p:nvPicPr>
+          <p:cNvPr id="2" name="Picture 1" descr="slide-09.png"/>
+          <p:cNvPicPr>
+            <a:picLocks noChangeAspect="1"/>
+          </p:cNvPicPr>
+          <p:nvPr/>
+        </p:nvPicPr>
+        <p:blipFill>
+          <a:blip r:embed="rId2"/>
+          <a:stretch>
+            <a:fillRect/>
+          </a:stretch>
+        </p:blipFill>
+        <p:spPr>
+          <a:xfrm>
+            <a:off x="0" y="0"/>
+            <a:ext cx="12191695" cy="6858000"/>
+          </a:xfrm>
+          <a:prstGeom prst="rect">
+            <a:avLst/>
+          </a:prstGeom>
+        </p:spPr>
+      </p:pic>
+    </p:spTree>
+  </p:cSld>
+  <p:clrMapOvr>
+    <a:masterClrMapping/>
+  </p:clrMapOvr>
 </p:sld>
 </file>
 
@@ -5286,265 +3997,4 @@
   </a:objectDefaults>
   <a:extraClrSchemeLst/>
 </a:theme>
-</file>
-
-<file path=ppt/theme/theme2.xml><?xml version="1.0" encoding="utf-8"?>
-<a:theme xmlns:a="http://schemas.openxmlformats.org/drawingml/2006/main" name="Office Theme">
-  <a:themeElements>
-    <a:clrScheme name="Office">
-      <a:dk1>
-        <a:sysClr val="windowText" lastClr="000000"/>
-      </a:dk1>
-      <a:lt1>
-        <a:sysClr val="window" lastClr="FFFFFF"/>
-      </a:lt1>
-      <a:dk2>
-        <a:srgbClr val="44546A"/>
-      </a:dk2>
-      <a:lt2>
-        <a:srgbClr val="E7E6E6"/>
-      </a:lt2>
-      <a:accent1>
-        <a:srgbClr val="5B9BD5"/>
-      </a:accent1>
-      <a:accent2>
-        <a:srgbClr val="ED7D31"/>
-      </a:accent2>
-      <a:accent3>
-        <a:srgbClr val="A5A5A5"/>
-      </a:accent3>
-      <a:accent4>
-        <a:srgbClr val="FFC000"/>
-      </a:accent4>
-      <a:accent5>
-        <a:srgbClr val="4472C4"/>
-      </a:accent5>
-      <a:accent6>
-        <a:srgbClr val="70AD47"/>
-      </a:accent6>
-      <a:hlink>
-        <a:srgbClr val="0563C1"/>
-      </a:hlink>
-      <a:folHlink>
-        <a:srgbClr val="954F72"/>
-      </a:folHlink>
-    </a:clrScheme>
-    <a:fontScheme name="Office">
-      <a:majorFont>
-        <a:latin typeface="Calibri Light" panose="020F0302020204030204"/>
-        <a:ea typeface=""/>
-        <a:cs typeface=""/>
-        <a:font script="Jpan" typeface="ＭＳ Ｐゴシック"/>
-        <a:font script="Hang" typeface="맑은 고딕"/>
-        <a:font script="Hans" typeface="宋体"/>
-        <a:font script="Hant" typeface="新細明體"/>
-        <a:font script="Arab" typeface="Times New Roman"/>
-        <a:font script="Hebr" typeface="Times New Roman"/>
-        <a:font script="Thai" typeface="Angsana New"/>
-        <a:font script="Ethi" typeface="Nyala"/>
-        <a:font script="Beng" typeface="Vrinda"/>
-        <a:font script="Gujr" typeface="Shruti"/>
-        <a:font script="Khmr" typeface="MoolBoran"/>
-        <a:font script="Knda" typeface="Tunga"/>
-        <a:font script="Guru" typeface="Raavi"/>
-        <a:font script="Cans" typeface="Euphemia"/>
-        <a:font script="Cher" typeface="Plantagenet Cherokee"/>
-        <a:font script="Yiii" typeface="Microsoft Yi Baiti"/>
-        <a:font script="Tibt" typeface="Microsoft Himalaya"/>
-        <a:font script="Thaa" typeface="MV Boli"/>
-        <a:font script="Deva" typeface="Mangal"/>
-        <a:font script="Telu" typeface="Gautami"/>
-        <a:font script="Taml" typeface="Latha"/>
-        <a:font script="Syrc" typeface="Estrangelo Edessa"/>
-        <a:font script="Orya" typeface="Kalinga"/>
-        <a:font script="Mlym" typeface="Kartika"/>
-        <a:font script="Laoo" typeface="DokChampa"/>
-        <a:font script="Sinh" typeface="Iskoola Pota"/>
-        <a:font script="Mong" typeface="Mongolian Baiti"/>
-        <a:font script="Viet" typeface="Times New Roman"/>
-        <a:font script="Uigh" typeface="Microsoft Uighur"/>
-        <a:font script="Geor" typeface="Sylfaen"/>
-      </a:majorFont>
-      <a:minorFont>
-        <a:latin typeface="Calibri" panose="020F0502020204030204"/>
-        <a:ea typeface=""/>
-        <a:cs typeface=""/>
-        <a:font script="Jpan" typeface="ＭＳ Ｐゴシック"/>
-        <a:font script="Hang" typeface="맑은 고딕"/>
-        <a:font script="Hans" typeface="宋体"/>
-        <a:font script="Hant" typeface="新細明體"/>
-        <a:font script="Arab" typeface="Arial"/>
-        <a:font script="Hebr" typeface="Arial"/>
-        <a:font script="Thai" typeface="Cordia New"/>
-        <a:font script="Ethi" typeface="Nyala"/>
-        <a:font script="Beng" typeface="Vrinda"/>
-        <a:font script="Gujr" typeface="Shruti"/>
-        <a:font script="Khmr" typeface="DaunPenh"/>
-        <a:font script="Knda" typeface="Tunga"/>
-        <a:font script="Guru" typeface="Raavi"/>
-        <a:font script="Cans" typeface="Euphemia"/>
-        <a:font script="Cher" typeface="Plantagenet Cherokee"/>
-        <a:font script="Yiii" typeface="Microsoft Yi Baiti"/>
-        <a:font script="Tibt" typeface="Microsoft Himalaya"/>
-        <a:font script="Thaa" typeface="MV Boli"/>
-        <a:font script="Deva" typeface="Mangal"/>
-        <a:font script="Telu" typeface="Gautami"/>
-        <a:font script="Taml" typeface="Latha"/>
-        <a:font script="Syrc" typeface="Estrangelo Edessa"/>
-        <a:font script="Orya" typeface="Kalinga"/>
-        <a:font script="Mlym" typeface="Kartika"/>
-        <a:font script="Laoo" typeface="DokChampa"/>
-        <a:font script="Sinh" typeface="Iskoola Pota"/>
-        <a:font script="Mong" typeface="Mongolian Baiti"/>
-        <a:font script="Viet" typeface="Arial"/>
-        <a:font script="Uigh" typeface="Microsoft Uighur"/>
-        <a:font script="Geor" typeface="Sylfaen"/>
-      </a:minorFont>
-    </a:fontScheme>
-    <a:fmtScheme name="Office">
-      <a:fillStyleLst>
-        <a:solidFill>
-          <a:schemeClr val="phClr"/>
-        </a:solidFill>
-        <a:gradFill rotWithShape="1">
-          <a:gsLst>
-            <a:gs pos="0">
-              <a:schemeClr val="phClr">
-                <a:lumMod val="110000"/>
-                <a:satMod val="105000"/>
-                <a:tint val="67000"/>
-              </a:schemeClr>
-            </a:gs>
-            <a:gs pos="50000">
-              <a:schemeClr val="phClr">
-                <a:lumMod val="105000"/>
-                <a:satMod val="103000"/>
-                <a:tint val="73000"/>
-              </a:schemeClr>
-            </a:gs>
-            <a:gs pos="100000">
-              <a:schemeClr val="phClr">
-                <a:lumMod val="105000"/>
-                <a:satMod val="109000"/>
-                <a:tint val="81000"/>
-              </a:schemeClr>
-            </a:gs>
-          </a:gsLst>
-          <a:lin ang="5400000" scaled="0"/>
-        </a:gradFill>
-        <a:gradFill rotWithShape="1">
-          <a:gsLst>
-            <a:gs pos="0">
-              <a:schemeClr val="phClr">
-                <a:satMod val="103000"/>
-                <a:lumMod val="102000"/>
-                <a:tint val="94000"/>
-              </a:schemeClr>
-            </a:gs>
-            <a:gs pos="50000">
-              <a:schemeClr val="phClr">
-                <a:satMod val="110000"/>
-                <a:lumMod val="100000"/>
-                <a:shade val="100000"/>
-              </a:schemeClr>
-            </a:gs>
-            <a:gs pos="100000">
-              <a:schemeClr val="phClr">
-                <a:lumMod val="99000"/>
-                <a:satMod val="120000"/>
-                <a:shade val="78000"/>
-              </a:schemeClr>
-            </a:gs>
-          </a:gsLst>
-          <a:lin ang="5400000" scaled="0"/>
-        </a:gradFill>
-      </a:fillStyleLst>
-      <a:lnStyleLst>
-        <a:ln w="6350" cap="flat" cmpd="sng" algn="ctr">
-          <a:solidFill>
-            <a:schemeClr val="phClr"/>
-          </a:solidFill>
-          <a:prstDash val="solid"/>
-          <a:miter lim="800000"/>
-        </a:ln>
-        <a:ln w="12700" cap="flat" cmpd="sng" algn="ctr">
-          <a:solidFill>
-            <a:schemeClr val="phClr"/>
-          </a:solidFill>
-          <a:prstDash val="solid"/>
-          <a:miter lim="800000"/>
-        </a:ln>
-        <a:ln w="19050" cap="flat" cmpd="sng" algn="ctr">
-          <a:solidFill>
-            <a:schemeClr val="phClr"/>
-          </a:solidFill>
-          <a:prstDash val="solid"/>
-          <a:miter lim="800000"/>
-        </a:ln>
-      </a:lnStyleLst>
-      <a:effectStyleLst>
-        <a:effectStyle>
-          <a:effectLst/>
-        </a:effectStyle>
-        <a:effectStyle>
-          <a:effectLst/>
-        </a:effectStyle>
-        <a:effectStyle>
-          <a:effectLst>
-            <a:outerShdw blurRad="57150" dist="19050" dir="5400000" algn="ctr" rotWithShape="0">
-              <a:srgbClr val="000000">
-                <a:alpha val="63000"/>
-              </a:srgbClr>
-            </a:outerShdw>
-          </a:effectLst>
-        </a:effectStyle>
-      </a:effectStyleLst>
-      <a:bgFillStyleLst>
-        <a:solidFill>
-          <a:schemeClr val="phClr"/>
-        </a:solidFill>
-        <a:solidFill>
-          <a:schemeClr val="phClr">
-            <a:tint val="95000"/>
-            <a:satMod val="170000"/>
-          </a:schemeClr>
-        </a:solidFill>
-        <a:gradFill rotWithShape="1">
-          <a:gsLst>
-            <a:gs pos="0">
-              <a:schemeClr val="phClr">
-                <a:tint val="93000"/>
-                <a:satMod val="150000"/>
-                <a:shade val="98000"/>
-                <a:lumMod val="102000"/>
-              </a:schemeClr>
-            </a:gs>
-            <a:gs pos="50000">
-              <a:schemeClr val="phClr">
-                <a:tint val="98000"/>
-                <a:satMod val="130000"/>
-                <a:shade val="90000"/>
-                <a:lumMod val="103000"/>
-              </a:schemeClr>
-            </a:gs>
-            <a:gs pos="100000">
-              <a:schemeClr val="phClr">
-                <a:shade val="63000"/>
-                <a:satMod val="120000"/>
-              </a:schemeClr>
-            </a:gs>
-          </a:gsLst>
-          <a:lin ang="5400000" scaled="0"/>
-        </a:gradFill>
-      </a:bgFillStyleLst>
-    </a:fmtScheme>
-  </a:themeElements>
-  <a:objectDefaults/>
-  <a:extraClrSchemeLst/>
-  <a:extLst>
-    <a:ext uri="{05A4C25C-085E-4340-85A3-A5531E510DB2}">
-      <thm15:themeFamily xmlns:thm15="http://schemas.microsoft.com/office/thememl/2012/main" name="Office Theme" id="{62F939B6-93AF-4DB8-9C6B-D6C7DFDC589F}" vid="{4A3C46E8-61CC-4603-A589-7422A47A8E4A}"/>
-    </a:ext>
-  </a:extLst>
-</a:theme>
 </file>